--- a/figures/manual-edits/manuel-edits-climgap.pptx
+++ b/figures/manual-edits/manuel-edits-climgap.pptx
@@ -5,13 +5,16 @@
     <p:sldMasterId id="2147483648" r:id="rId1"/>
   </p:sldMasterIdLst>
   <p:notesMasterIdLst>
-    <p:notesMasterId r:id="rId6"/>
+    <p:notesMasterId r:id="rId9"/>
   </p:notesMasterIdLst>
   <p:sldIdLst>
-    <p:sldId id="260" r:id="rId2"/>
-    <p:sldId id="259" r:id="rId3"/>
-    <p:sldId id="258" r:id="rId4"/>
-    <p:sldId id="256" r:id="rId5"/>
+    <p:sldId id="261" r:id="rId2"/>
+    <p:sldId id="262" r:id="rId3"/>
+    <p:sldId id="263" r:id="rId4"/>
+    <p:sldId id="260" r:id="rId5"/>
+    <p:sldId id="259" r:id="rId6"/>
+    <p:sldId id="258" r:id="rId7"/>
+    <p:sldId id="256" r:id="rId8"/>
   </p:sldIdLst>
   <p:sldSz cx="12192000" cy="6858000"/>
   <p:notesSz cx="6858000" cy="9144000"/>
@@ -200,7 +203,7 @@
           <a:p>
             <a:fld id="{C23D2418-4917-7546-93DC-DC17F4B3C1F3}" type="datetimeFigureOut">
               <a:rPr lang="en-CA" smtClean="0"/>
-              <a:t>2026-04-29</a:t>
+              <a:t>2026-06-11</a:t>
             </a:fld>
             <a:endParaRPr lang="en-CA"/>
           </a:p>
@@ -560,7 +563,7 @@
           <a:p>
             <a:fld id="{911DAC2A-DA31-844B-A375-64D1B7617311}" type="slidenum">
               <a:rPr lang="en-CA" smtClean="0"/>
-              <a:t>1</a:t>
+              <a:t>4</a:t>
             </a:fld>
             <a:endParaRPr lang="en-CA"/>
           </a:p>
@@ -671,7 +674,7 @@
           <a:p>
             <a:fld id="{911DAC2A-DA31-844B-A375-64D1B7617311}" type="slidenum">
               <a:rPr lang="en-CA" smtClean="0"/>
-              <a:t>2</a:t>
+              <a:t>5</a:t>
             </a:fld>
             <a:endParaRPr lang="en-CA"/>
           </a:p>
@@ -839,7 +842,7 @@
           <a:p>
             <a:fld id="{7EB4ECC6-0683-4148-99E6-87DFB0CAA85B}" type="datetimeFigureOut">
               <a:rPr lang="en-CA" smtClean="0"/>
-              <a:t>2026-04-29</a:t>
+              <a:t>2026-06-11</a:t>
             </a:fld>
             <a:endParaRPr lang="en-CA"/>
           </a:p>
@@ -1039,7 +1042,7 @@
           <a:p>
             <a:fld id="{7EB4ECC6-0683-4148-99E6-87DFB0CAA85B}" type="datetimeFigureOut">
               <a:rPr lang="en-CA" smtClean="0"/>
-              <a:t>2026-04-29</a:t>
+              <a:t>2026-06-11</a:t>
             </a:fld>
             <a:endParaRPr lang="en-CA"/>
           </a:p>
@@ -1249,7 +1252,7 @@
           <a:p>
             <a:fld id="{7EB4ECC6-0683-4148-99E6-87DFB0CAA85B}" type="datetimeFigureOut">
               <a:rPr lang="en-CA" smtClean="0"/>
-              <a:t>2026-04-29</a:t>
+              <a:t>2026-06-11</a:t>
             </a:fld>
             <a:endParaRPr lang="en-CA"/>
           </a:p>
@@ -1449,7 +1452,7 @@
           <a:p>
             <a:fld id="{7EB4ECC6-0683-4148-99E6-87DFB0CAA85B}" type="datetimeFigureOut">
               <a:rPr lang="en-CA" smtClean="0"/>
-              <a:t>2026-04-29</a:t>
+              <a:t>2026-06-11</a:t>
             </a:fld>
             <a:endParaRPr lang="en-CA"/>
           </a:p>
@@ -1725,7 +1728,7 @@
           <a:p>
             <a:fld id="{7EB4ECC6-0683-4148-99E6-87DFB0CAA85B}" type="datetimeFigureOut">
               <a:rPr lang="en-CA" smtClean="0"/>
-              <a:t>2026-04-29</a:t>
+              <a:t>2026-06-11</a:t>
             </a:fld>
             <a:endParaRPr lang="en-CA"/>
           </a:p>
@@ -1993,7 +1996,7 @@
           <a:p>
             <a:fld id="{7EB4ECC6-0683-4148-99E6-87DFB0CAA85B}" type="datetimeFigureOut">
               <a:rPr lang="en-CA" smtClean="0"/>
-              <a:t>2026-04-29</a:t>
+              <a:t>2026-06-11</a:t>
             </a:fld>
             <a:endParaRPr lang="en-CA"/>
           </a:p>
@@ -2408,7 +2411,7 @@
           <a:p>
             <a:fld id="{7EB4ECC6-0683-4148-99E6-87DFB0CAA85B}" type="datetimeFigureOut">
               <a:rPr lang="en-CA" smtClean="0"/>
-              <a:t>2026-04-29</a:t>
+              <a:t>2026-06-11</a:t>
             </a:fld>
             <a:endParaRPr lang="en-CA"/>
           </a:p>
@@ -2550,7 +2553,7 @@
           <a:p>
             <a:fld id="{7EB4ECC6-0683-4148-99E6-87DFB0CAA85B}" type="datetimeFigureOut">
               <a:rPr lang="en-CA" smtClean="0"/>
-              <a:t>2026-04-29</a:t>
+              <a:t>2026-06-11</a:t>
             </a:fld>
             <a:endParaRPr lang="en-CA"/>
           </a:p>
@@ -2663,7 +2666,7 @@
           <a:p>
             <a:fld id="{7EB4ECC6-0683-4148-99E6-87DFB0CAA85B}" type="datetimeFigureOut">
               <a:rPr lang="en-CA" smtClean="0"/>
-              <a:t>2026-04-29</a:t>
+              <a:t>2026-06-11</a:t>
             </a:fld>
             <a:endParaRPr lang="en-CA"/>
           </a:p>
@@ -2976,7 +2979,7 @@
           <a:p>
             <a:fld id="{7EB4ECC6-0683-4148-99E6-87DFB0CAA85B}" type="datetimeFigureOut">
               <a:rPr lang="en-CA" smtClean="0"/>
-              <a:t>2026-04-29</a:t>
+              <a:t>2026-06-11</a:t>
             </a:fld>
             <a:endParaRPr lang="en-CA"/>
           </a:p>
@@ -3265,7 +3268,7 @@
           <a:p>
             <a:fld id="{7EB4ECC6-0683-4148-99E6-87DFB0CAA85B}" type="datetimeFigureOut">
               <a:rPr lang="en-CA" smtClean="0"/>
-              <a:t>2026-04-29</a:t>
+              <a:t>2026-06-11</a:t>
             </a:fld>
             <a:endParaRPr lang="en-CA"/>
           </a:p>
@@ -3508,7 +3511,7 @@
           <a:p>
             <a:fld id="{7EB4ECC6-0683-4148-99E6-87DFB0CAA85B}" type="datetimeFigureOut">
               <a:rPr lang="en-CA" smtClean="0"/>
-              <a:t>2026-04-29</a:t>
+              <a:t>2026-06-11</a:t>
             </a:fld>
             <a:endParaRPr lang="en-CA"/>
           </a:p>
@@ -3909,6 +3912,1806 @@
 </file>
 
 <file path=ppt/slides/slide1.xml><?xml version="1.0" encoding="utf-8"?>
+<p:sld xmlns:a="http://schemas.openxmlformats.org/drawingml/2006/main" xmlns:r="http://schemas.openxmlformats.org/officeDocument/2006/relationships" xmlns:p="http://schemas.openxmlformats.org/presentationml/2006/main">
+  <p:cSld>
+    <p:spTree>
+      <p:nvGrpSpPr>
+        <p:cNvPr id="1" name=""/>
+        <p:cNvGrpSpPr/>
+        <p:nvPr/>
+      </p:nvGrpSpPr>
+      <p:grpSpPr>
+        <a:xfrm>
+          <a:off x="0" y="0"/>
+          <a:ext cx="0" cy="0"/>
+          <a:chOff x="0" y="0"/>
+          <a:chExt cx="0" cy="0"/>
+        </a:xfrm>
+      </p:grpSpPr>
+      <p:grpSp>
+        <p:nvGrpSpPr>
+          <p:cNvPr id="38" name="Group 37">
+            <a:extLst>
+              <a:ext uri="{FF2B5EF4-FFF2-40B4-BE49-F238E27FC236}">
+                <a16:creationId xmlns:a16="http://schemas.microsoft.com/office/drawing/2014/main" id="{D4D3E0B4-5947-89D9-1B39-98A19CAFB015}"/>
+              </a:ext>
+            </a:extLst>
+          </p:cNvPr>
+          <p:cNvGrpSpPr/>
+          <p:nvPr/>
+        </p:nvGrpSpPr>
+        <p:grpSpPr>
+          <a:xfrm>
+            <a:off x="0" y="-401782"/>
+            <a:ext cx="12192000" cy="7121236"/>
+            <a:chOff x="0" y="-443344"/>
+            <a:chExt cx="12192000" cy="7121236"/>
+          </a:xfrm>
+        </p:grpSpPr>
+        <p:sp>
+          <p:nvSpPr>
+            <p:cNvPr id="37" name="Rectangle 36">
+              <a:extLst>
+                <a:ext uri="{FF2B5EF4-FFF2-40B4-BE49-F238E27FC236}">
+                  <a16:creationId xmlns:a16="http://schemas.microsoft.com/office/drawing/2014/main" id="{B35B8610-D3E8-F0E4-2893-F9BB792329F9}"/>
+                </a:ext>
+              </a:extLst>
+            </p:cNvPr>
+            <p:cNvSpPr/>
+            <p:nvPr/>
+          </p:nvSpPr>
+          <p:spPr>
+            <a:xfrm>
+              <a:off x="0" y="-443344"/>
+              <a:ext cx="12192000" cy="7121236"/>
+            </a:xfrm>
+            <a:prstGeom prst="rect">
+              <a:avLst/>
+            </a:prstGeom>
+            <a:solidFill>
+              <a:schemeClr val="bg1"/>
+            </a:solidFill>
+            <a:ln>
+              <a:noFill/>
+            </a:ln>
+          </p:spPr>
+          <p:style>
+            <a:lnRef idx="2">
+              <a:schemeClr val="accent1">
+                <a:shade val="15000"/>
+              </a:schemeClr>
+            </a:lnRef>
+            <a:fillRef idx="1">
+              <a:schemeClr val="accent1"/>
+            </a:fillRef>
+            <a:effectRef idx="0">
+              <a:schemeClr val="accent1"/>
+            </a:effectRef>
+            <a:fontRef idx="minor">
+              <a:schemeClr val="lt1"/>
+            </a:fontRef>
+          </p:style>
+          <p:txBody>
+            <a:bodyPr rtlCol="0" anchor="ctr"/>
+            <a:lstStyle/>
+            <a:p>
+              <a:pPr algn="ctr"/>
+              <a:endParaRPr lang="en-CA"/>
+            </a:p>
+          </p:txBody>
+        </p:sp>
+        <p:grpSp>
+          <p:nvGrpSpPr>
+            <p:cNvPr id="36" name="Group 35">
+              <a:extLst>
+                <a:ext uri="{FF2B5EF4-FFF2-40B4-BE49-F238E27FC236}">
+                  <a16:creationId xmlns:a16="http://schemas.microsoft.com/office/drawing/2014/main" id="{5CE847AB-0642-CAAF-482C-E87C78E84D75}"/>
+                </a:ext>
+              </a:extLst>
+            </p:cNvPr>
+            <p:cNvGrpSpPr/>
+            <p:nvPr/>
+          </p:nvGrpSpPr>
+          <p:grpSpPr>
+            <a:xfrm>
+              <a:off x="226186" y="-321752"/>
+              <a:ext cx="11965814" cy="6788710"/>
+              <a:chOff x="226186" y="-321752"/>
+              <a:chExt cx="11965814" cy="6788710"/>
+            </a:xfrm>
+          </p:grpSpPr>
+          <p:pic>
+            <p:nvPicPr>
+              <p:cNvPr id="7" name="Picture 6" descr="A map of canada with different colors&#10;&#10;Description automatically generated">
+                <a:extLst>
+                  <a:ext uri="{FF2B5EF4-FFF2-40B4-BE49-F238E27FC236}">
+                    <a16:creationId xmlns:a16="http://schemas.microsoft.com/office/drawing/2014/main" id="{D2F69B96-847E-8808-2DF1-20D405EEDA0F}"/>
+                  </a:ext>
+                </a:extLst>
+              </p:cNvPr>
+              <p:cNvPicPr>
+                <a:picLocks noChangeAspect="1"/>
+              </p:cNvPicPr>
+              <p:nvPr/>
+            </p:nvPicPr>
+            <p:blipFill>
+              <a:blip r:embed="rId2"/>
+              <a:srcRect l="30829" t="23524" r="21551" b="9234"/>
+              <a:stretch/>
+            </p:blipFill>
+            <p:spPr>
+              <a:xfrm>
+                <a:off x="226186" y="828393"/>
+                <a:ext cx="6243390" cy="5563961"/>
+              </a:xfrm>
+              <a:prstGeom prst="rect">
+                <a:avLst/>
+              </a:prstGeom>
+            </p:spPr>
+          </p:pic>
+          <p:pic>
+            <p:nvPicPr>
+              <p:cNvPr id="8" name="Picture 7" descr="A graph of a temperature&#10;&#10;Description automatically generated">
+                <a:extLst>
+                  <a:ext uri="{FF2B5EF4-FFF2-40B4-BE49-F238E27FC236}">
+                    <a16:creationId xmlns:a16="http://schemas.microsoft.com/office/drawing/2014/main" id="{B02599FF-B19D-53A8-0D75-972EA0CB147B}"/>
+                  </a:ext>
+                </a:extLst>
+              </p:cNvPr>
+              <p:cNvPicPr>
+                <a:picLocks noChangeAspect="1"/>
+              </p:cNvPicPr>
+              <p:nvPr/>
+            </p:nvPicPr>
+            <p:blipFill>
+              <a:blip r:embed="rId3"/>
+              <a:srcRect l="18808" t="6643" r="2897" b="88577"/>
+              <a:stretch/>
+            </p:blipFill>
+            <p:spPr>
+              <a:xfrm>
+                <a:off x="1365293" y="151217"/>
+                <a:ext cx="10826707" cy="650724"/>
+              </a:xfrm>
+              <a:prstGeom prst="rect">
+                <a:avLst/>
+              </a:prstGeom>
+            </p:spPr>
+          </p:pic>
+          <p:sp>
+            <p:nvSpPr>
+              <p:cNvPr id="14" name="TextBox 13">
+                <a:extLst>
+                  <a:ext uri="{FF2B5EF4-FFF2-40B4-BE49-F238E27FC236}">
+                    <a16:creationId xmlns:a16="http://schemas.microsoft.com/office/drawing/2014/main" id="{2B11B309-9A26-A859-953C-D5F9FD8046D9}"/>
+                  </a:ext>
+                </a:extLst>
+              </p:cNvPr>
+              <p:cNvSpPr txBox="1"/>
+              <p:nvPr/>
+            </p:nvSpPr>
+            <p:spPr>
+              <a:xfrm>
+                <a:off x="11253104" y="245674"/>
+                <a:ext cx="636713" cy="461665"/>
+              </a:xfrm>
+              <a:prstGeom prst="rect">
+                <a:avLst/>
+              </a:prstGeom>
+              <a:noFill/>
+            </p:spPr>
+            <p:txBody>
+              <a:bodyPr wrap="none" rtlCol="0">
+                <a:spAutoFit/>
+              </a:bodyPr>
+              <a:lstStyle/>
+              <a:p>
+                <a:r>
+                  <a:rPr lang="en-CA" sz="2400" b="1" dirty="0">
+                    <a:ln w="3175">
+                      <a:noFill/>
+                    </a:ln>
+                    <a:latin typeface="ROBOTO CONDENSED LIGHT" pitchFamily="2" charset="0"/>
+                    <a:ea typeface="ROBOTO CONDENSED LIGHT" pitchFamily="2" charset="0"/>
+                  </a:rPr>
+                  <a:t>Full</a:t>
+                </a:r>
+              </a:p>
+            </p:txBody>
+          </p:sp>
+          <p:sp>
+            <p:nvSpPr>
+              <p:cNvPr id="15" name="TextBox 14">
+                <a:extLst>
+                  <a:ext uri="{FF2B5EF4-FFF2-40B4-BE49-F238E27FC236}">
+                    <a16:creationId xmlns:a16="http://schemas.microsoft.com/office/drawing/2014/main" id="{C033BC79-E099-83B2-D2CB-ECF4CCDDFF72}"/>
+                  </a:ext>
+                </a:extLst>
+              </p:cNvPr>
+              <p:cNvSpPr txBox="1"/>
+              <p:nvPr/>
+            </p:nvSpPr>
+            <p:spPr>
+              <a:xfrm>
+                <a:off x="1581094" y="235692"/>
+                <a:ext cx="769763" cy="461665"/>
+              </a:xfrm>
+              <a:prstGeom prst="rect">
+                <a:avLst/>
+              </a:prstGeom>
+              <a:noFill/>
+            </p:spPr>
+            <p:txBody>
+              <a:bodyPr wrap="none" rtlCol="0">
+                <a:spAutoFit/>
+              </a:bodyPr>
+              <a:lstStyle/>
+              <a:p>
+                <a:r>
+                  <a:rPr lang="en-CA" sz="2400" b="1" dirty="0">
+                    <a:ln w="3175">
+                      <a:noFill/>
+                    </a:ln>
+                    <a:latin typeface="ROBOTO CONDENSED LIGHT" pitchFamily="2" charset="0"/>
+                    <a:ea typeface="ROBOTO CONDENSED LIGHT" pitchFamily="2" charset="0"/>
+                  </a:rPr>
+                  <a:t>Poor</a:t>
+                </a:r>
+              </a:p>
+            </p:txBody>
+          </p:sp>
+          <p:sp>
+            <p:nvSpPr>
+              <p:cNvPr id="16" name="TextBox 15">
+                <a:extLst>
+                  <a:ext uri="{FF2B5EF4-FFF2-40B4-BE49-F238E27FC236}">
+                    <a16:creationId xmlns:a16="http://schemas.microsoft.com/office/drawing/2014/main" id="{FA03688A-0320-9801-FFCC-C3DDB3E147E9}"/>
+                  </a:ext>
+                </a:extLst>
+              </p:cNvPr>
+              <p:cNvSpPr txBox="1"/>
+              <p:nvPr/>
+            </p:nvSpPr>
+            <p:spPr>
+              <a:xfrm>
+                <a:off x="5981473" y="245674"/>
+                <a:ext cx="1375698" cy="461665"/>
+              </a:xfrm>
+              <a:prstGeom prst="rect">
+                <a:avLst/>
+              </a:prstGeom>
+              <a:noFill/>
+            </p:spPr>
+            <p:txBody>
+              <a:bodyPr wrap="none" rtlCol="0">
+                <a:spAutoFit/>
+              </a:bodyPr>
+              <a:lstStyle/>
+              <a:p>
+                <a:r>
+                  <a:rPr lang="en-CA" sz="2400" b="1" dirty="0">
+                    <a:ln w="3175">
+                      <a:noFill/>
+                    </a:ln>
+                    <a:latin typeface="ROBOTO CONDENSED LIGHT" pitchFamily="2" charset="0"/>
+                    <a:ea typeface="ROBOTO CONDENSED LIGHT" pitchFamily="2" charset="0"/>
+                  </a:rPr>
+                  <a:t>Moderate</a:t>
+                </a:r>
+              </a:p>
+            </p:txBody>
+          </p:sp>
+          <p:pic>
+            <p:nvPicPr>
+              <p:cNvPr id="18" name="Picture 17" descr="A graph of a temperature&#10;&#10;Description automatically generated">
+                <a:extLst>
+                  <a:ext uri="{FF2B5EF4-FFF2-40B4-BE49-F238E27FC236}">
+                    <a16:creationId xmlns:a16="http://schemas.microsoft.com/office/drawing/2014/main" id="{7474DB04-A0B2-930D-34A7-38757BEE2911}"/>
+                  </a:ext>
+                </a:extLst>
+              </p:cNvPr>
+              <p:cNvPicPr>
+                <a:picLocks noChangeAspect="1"/>
+              </p:cNvPicPr>
+              <p:nvPr/>
+            </p:nvPicPr>
+            <p:blipFill>
+              <a:blip r:embed="rId4"/>
+              <a:srcRect l="56961" t="60758" r="38021" b="35842"/>
+              <a:stretch/>
+            </p:blipFill>
+            <p:spPr>
+              <a:xfrm>
+                <a:off x="478266" y="251719"/>
+                <a:ext cx="1000800" cy="449573"/>
+              </a:xfrm>
+              <a:prstGeom prst="rect">
+                <a:avLst/>
+              </a:prstGeom>
+            </p:spPr>
+          </p:pic>
+          <p:sp>
+            <p:nvSpPr>
+              <p:cNvPr id="19" name="TextBox 18">
+                <a:extLst>
+                  <a:ext uri="{FF2B5EF4-FFF2-40B4-BE49-F238E27FC236}">
+                    <a16:creationId xmlns:a16="http://schemas.microsoft.com/office/drawing/2014/main" id="{4785D624-DA49-08C0-7953-F1433A6A07C6}"/>
+                  </a:ext>
+                </a:extLst>
+              </p:cNvPr>
+              <p:cNvSpPr txBox="1"/>
+              <p:nvPr/>
+            </p:nvSpPr>
+            <p:spPr>
+              <a:xfrm>
+                <a:off x="535315" y="235692"/>
+                <a:ext cx="838691" cy="461665"/>
+              </a:xfrm>
+              <a:prstGeom prst="rect">
+                <a:avLst/>
+              </a:prstGeom>
+              <a:noFill/>
+            </p:spPr>
+            <p:txBody>
+              <a:bodyPr wrap="none" rtlCol="0">
+                <a:spAutoFit/>
+              </a:bodyPr>
+              <a:lstStyle/>
+              <a:p>
+                <a:r>
+                  <a:rPr lang="en-CA" sz="2400" b="1" dirty="0">
+                    <a:ln w="3175">
+                      <a:noFill/>
+                    </a:ln>
+                    <a:latin typeface="ROBOTO CONDENSED LIGHT" pitchFamily="2" charset="0"/>
+                    <a:ea typeface="ROBOTO CONDENSED LIGHT" pitchFamily="2" charset="0"/>
+                  </a:rPr>
+                  <a:t>None</a:t>
+                </a:r>
+              </a:p>
+            </p:txBody>
+          </p:sp>
+          <p:sp>
+            <p:nvSpPr>
+              <p:cNvPr id="21" name="TextBox 20">
+                <a:extLst>
+                  <a:ext uri="{FF2B5EF4-FFF2-40B4-BE49-F238E27FC236}">
+                    <a16:creationId xmlns:a16="http://schemas.microsoft.com/office/drawing/2014/main" id="{76486B53-D6FC-BD36-F4F3-01844CAE9CB4}"/>
+                  </a:ext>
+                </a:extLst>
+              </p:cNvPr>
+              <p:cNvSpPr txBox="1"/>
+              <p:nvPr/>
+            </p:nvSpPr>
+            <p:spPr>
+              <a:xfrm>
+                <a:off x="413201" y="-321752"/>
+                <a:ext cx="3779947" cy="523220"/>
+              </a:xfrm>
+              <a:prstGeom prst="rect">
+                <a:avLst/>
+              </a:prstGeom>
+              <a:noFill/>
+            </p:spPr>
+            <p:txBody>
+              <a:bodyPr wrap="square" rtlCol="0">
+                <a:spAutoFit/>
+              </a:bodyPr>
+              <a:lstStyle/>
+              <a:p>
+                <a:r>
+                  <a:rPr lang="en-CA" sz="2800" b="1" dirty="0">
+                    <a:latin typeface="Roboto Condensed" pitchFamily="2" charset="0"/>
+                    <a:ea typeface="Roboto Condensed" pitchFamily="2" charset="0"/>
+                  </a:rPr>
+                  <a:t>Climate coverage</a:t>
+                </a:r>
+              </a:p>
+            </p:txBody>
+          </p:sp>
+          <p:pic>
+            <p:nvPicPr>
+              <p:cNvPr id="25" name="Picture 24" descr="A graph of a temperature&#10;&#10;Description automatically generated">
+                <a:extLst>
+                  <a:ext uri="{FF2B5EF4-FFF2-40B4-BE49-F238E27FC236}">
+                    <a16:creationId xmlns:a16="http://schemas.microsoft.com/office/drawing/2014/main" id="{F4056E58-428C-339F-25AD-2F6DF91D43A8}"/>
+                  </a:ext>
+                </a:extLst>
+              </p:cNvPr>
+              <p:cNvPicPr>
+                <a:picLocks noChangeAspect="1"/>
+              </p:cNvPicPr>
+              <p:nvPr/>
+            </p:nvPicPr>
+            <p:blipFill>
+              <a:blip r:embed="rId5"/>
+              <a:srcRect l="9849" t="16175" r="3899" b="4260"/>
+              <a:stretch/>
+            </p:blipFill>
+            <p:spPr>
+              <a:xfrm>
+                <a:off x="6669322" y="1010353"/>
+                <a:ext cx="5441499" cy="5456605"/>
+              </a:xfrm>
+              <a:prstGeom prst="rect">
+                <a:avLst/>
+              </a:prstGeom>
+            </p:spPr>
+          </p:pic>
+          <p:sp>
+            <p:nvSpPr>
+              <p:cNvPr id="27" name="TextBox 26">
+                <a:extLst>
+                  <a:ext uri="{FF2B5EF4-FFF2-40B4-BE49-F238E27FC236}">
+                    <a16:creationId xmlns:a16="http://schemas.microsoft.com/office/drawing/2014/main" id="{AF038F40-313F-9F15-126E-0E3A273E2553}"/>
+                  </a:ext>
+                </a:extLst>
+              </p:cNvPr>
+              <p:cNvSpPr txBox="1"/>
+              <p:nvPr/>
+            </p:nvSpPr>
+            <p:spPr>
+              <a:xfrm>
+                <a:off x="8129822" y="3230796"/>
+                <a:ext cx="1508101" cy="707886"/>
+              </a:xfrm>
+              <a:prstGeom prst="rect">
+                <a:avLst/>
+              </a:prstGeom>
+              <a:noFill/>
+            </p:spPr>
+            <p:txBody>
+              <a:bodyPr wrap="square" rtlCol="0">
+                <a:spAutoFit/>
+              </a:bodyPr>
+              <a:lstStyle/>
+              <a:p>
+                <a:r>
+                  <a:rPr lang="en-CA" sz="2000" dirty="0">
+                    <a:latin typeface="Roboto Condensed Light" pitchFamily="2" charset="0"/>
+                    <a:ea typeface="Roboto Condensed Light" pitchFamily="2" charset="0"/>
+                  </a:rPr>
+                  <a:t>Not sampled during BTG</a:t>
+                </a:r>
+                <a:endParaRPr lang="en-CA" sz="2000" dirty="0">
+                  <a:latin typeface="Roboto Condensed Light" pitchFamily="2" charset="0"/>
+                  <a:ea typeface="Roboto Condensed Light" pitchFamily="2" charset="0"/>
+                </a:endParaRPr>
+              </a:p>
+            </p:txBody>
+          </p:sp>
+          <p:cxnSp>
+            <p:nvCxnSpPr>
+              <p:cNvPr id="29" name="Straight Arrow Connector 28">
+                <a:extLst>
+                  <a:ext uri="{FF2B5EF4-FFF2-40B4-BE49-F238E27FC236}">
+                    <a16:creationId xmlns:a16="http://schemas.microsoft.com/office/drawing/2014/main" id="{AC563ACE-F444-C8EA-A09C-CB550A15AF38}"/>
+                  </a:ext>
+                </a:extLst>
+              </p:cNvPr>
+              <p:cNvCxnSpPr>
+                <a:cxnSpLocks/>
+              </p:cNvCxnSpPr>
+              <p:nvPr/>
+            </p:nvCxnSpPr>
+            <p:spPr>
+              <a:xfrm>
+                <a:off x="9043355" y="3938682"/>
+                <a:ext cx="374754" cy="311717"/>
+              </a:xfrm>
+              <a:prstGeom prst="straightConnector1">
+                <a:avLst/>
+              </a:prstGeom>
+              <a:ln>
+                <a:tailEnd type="triangle"/>
+              </a:ln>
+            </p:spPr>
+            <p:style>
+              <a:lnRef idx="1">
+                <a:schemeClr val="dk1"/>
+              </a:lnRef>
+              <a:fillRef idx="0">
+                <a:schemeClr val="dk1"/>
+              </a:fillRef>
+              <a:effectRef idx="0">
+                <a:schemeClr val="dk1"/>
+              </a:effectRef>
+              <a:fontRef idx="minor">
+                <a:schemeClr val="tx1"/>
+              </a:fontRef>
+            </p:style>
+          </p:cxnSp>
+          <p:pic>
+            <p:nvPicPr>
+              <p:cNvPr id="32" name="Picture 31" descr="A graph of a temperature&#10;&#10;Description automatically generated">
+                <a:extLst>
+                  <a:ext uri="{FF2B5EF4-FFF2-40B4-BE49-F238E27FC236}">
+                    <a16:creationId xmlns:a16="http://schemas.microsoft.com/office/drawing/2014/main" id="{EE54CD83-8DB4-6B7E-2BCC-2633BF0823BC}"/>
+                  </a:ext>
+                </a:extLst>
+              </p:cNvPr>
+              <p:cNvPicPr>
+                <a:picLocks noChangeAspect="1"/>
+              </p:cNvPicPr>
+              <p:nvPr/>
+            </p:nvPicPr>
+            <p:blipFill>
+              <a:blip r:embed="rId5"/>
+              <a:srcRect l="2248" t="16175" r="90469" b="46150"/>
+              <a:stretch/>
+            </p:blipFill>
+            <p:spPr>
+              <a:xfrm>
+                <a:off x="6167771" y="1154909"/>
+                <a:ext cx="459491" cy="2583746"/>
+              </a:xfrm>
+              <a:prstGeom prst="rect">
+                <a:avLst/>
+              </a:prstGeom>
+            </p:spPr>
+          </p:pic>
+          <p:sp>
+            <p:nvSpPr>
+              <p:cNvPr id="34" name="TextBox 33">
+                <a:extLst>
+                  <a:ext uri="{FF2B5EF4-FFF2-40B4-BE49-F238E27FC236}">
+                    <a16:creationId xmlns:a16="http://schemas.microsoft.com/office/drawing/2014/main" id="{AF037A0F-8D94-818E-AFDD-F5C76A7C53F7}"/>
+                  </a:ext>
+                </a:extLst>
+              </p:cNvPr>
+              <p:cNvSpPr txBox="1"/>
+              <p:nvPr/>
+            </p:nvSpPr>
+            <p:spPr>
+              <a:xfrm>
+                <a:off x="445347" y="975139"/>
+                <a:ext cx="410690" cy="646331"/>
+              </a:xfrm>
+              <a:prstGeom prst="rect">
+                <a:avLst/>
+              </a:prstGeom>
+              <a:noFill/>
+            </p:spPr>
+            <p:txBody>
+              <a:bodyPr wrap="none" rtlCol="0">
+                <a:spAutoFit/>
+              </a:bodyPr>
+              <a:lstStyle/>
+              <a:p>
+                <a:r>
+                  <a:rPr lang="en-CA" sz="3600" b="1" dirty="0">
+                    <a:ln w="3175">
+                      <a:noFill/>
+                    </a:ln>
+                    <a:latin typeface="ROBOTO CONDENSED LIGHT" pitchFamily="2" charset="0"/>
+                    <a:ea typeface="ROBOTO CONDENSED LIGHT" pitchFamily="2" charset="0"/>
+                  </a:rPr>
+                  <a:t>a</a:t>
+                </a:r>
+              </a:p>
+            </p:txBody>
+          </p:sp>
+          <p:sp>
+            <p:nvSpPr>
+              <p:cNvPr id="35" name="TextBox 34">
+                <a:extLst>
+                  <a:ext uri="{FF2B5EF4-FFF2-40B4-BE49-F238E27FC236}">
+                    <a16:creationId xmlns:a16="http://schemas.microsoft.com/office/drawing/2014/main" id="{E13F5253-0D89-4ABB-3355-8B6E3273A2B9}"/>
+                  </a:ext>
+                </a:extLst>
+              </p:cNvPr>
+              <p:cNvSpPr txBox="1"/>
+              <p:nvPr/>
+            </p:nvSpPr>
+            <p:spPr>
+              <a:xfrm>
+                <a:off x="5772121" y="975139"/>
+                <a:ext cx="418704" cy="646331"/>
+              </a:xfrm>
+              <a:prstGeom prst="rect">
+                <a:avLst/>
+              </a:prstGeom>
+              <a:noFill/>
+              <a:ln>
+                <a:noFill/>
+              </a:ln>
+            </p:spPr>
+            <p:txBody>
+              <a:bodyPr wrap="none" rtlCol="0">
+                <a:spAutoFit/>
+              </a:bodyPr>
+              <a:lstStyle/>
+              <a:p>
+                <a:r>
+                  <a:rPr lang="en-CA" sz="3600" b="1" dirty="0">
+                    <a:ln w="3175">
+                      <a:noFill/>
+                    </a:ln>
+                    <a:latin typeface="ROBOTO CONDENSED LIGHT" pitchFamily="2" charset="0"/>
+                    <a:ea typeface="ROBOTO CONDENSED LIGHT" pitchFamily="2" charset="0"/>
+                  </a:rPr>
+                  <a:t>b</a:t>
+                </a:r>
+              </a:p>
+            </p:txBody>
+          </p:sp>
+        </p:grpSp>
+      </p:grpSp>
+    </p:spTree>
+    <p:extLst>
+      <p:ext uri="{BB962C8B-B14F-4D97-AF65-F5344CB8AC3E}">
+        <p14:creationId xmlns:p14="http://schemas.microsoft.com/office/powerpoint/2010/main" val="1331748984"/>
+      </p:ext>
+    </p:extLst>
+  </p:cSld>
+  <p:clrMapOvr>
+    <a:masterClrMapping/>
+  </p:clrMapOvr>
+</p:sld>
+</file>
+
+<file path=ppt/slides/slide2.xml><?xml version="1.0" encoding="utf-8"?>
+<p:sld xmlns:a="http://schemas.openxmlformats.org/drawingml/2006/main" xmlns:r="http://schemas.openxmlformats.org/officeDocument/2006/relationships" xmlns:p="http://schemas.openxmlformats.org/presentationml/2006/main">
+  <p:cSld>
+    <p:spTree>
+      <p:nvGrpSpPr>
+        <p:cNvPr id="1" name="">
+          <a:extLst>
+            <a:ext uri="{FF2B5EF4-FFF2-40B4-BE49-F238E27FC236}">
+              <a16:creationId xmlns:a16="http://schemas.microsoft.com/office/drawing/2014/main" id="{DF30997C-4E66-2889-A540-78B5723D738B}"/>
+            </a:ext>
+          </a:extLst>
+        </p:cNvPr>
+        <p:cNvGrpSpPr/>
+        <p:nvPr/>
+      </p:nvGrpSpPr>
+      <p:grpSpPr>
+        <a:xfrm>
+          <a:off x="0" y="0"/>
+          <a:ext cx="0" cy="0"/>
+          <a:chOff x="0" y="0"/>
+          <a:chExt cx="0" cy="0"/>
+        </a:xfrm>
+      </p:grpSpPr>
+      <p:grpSp>
+        <p:nvGrpSpPr>
+          <p:cNvPr id="10" name="Group 9">
+            <a:extLst>
+              <a:ext uri="{FF2B5EF4-FFF2-40B4-BE49-F238E27FC236}">
+                <a16:creationId xmlns:a16="http://schemas.microsoft.com/office/drawing/2014/main" id="{D78A8329-7DDA-A24A-2B27-79825651A20F}"/>
+              </a:ext>
+            </a:extLst>
+          </p:cNvPr>
+          <p:cNvGrpSpPr/>
+          <p:nvPr/>
+        </p:nvGrpSpPr>
+        <p:grpSpPr>
+          <a:xfrm>
+            <a:off x="-15367" y="-401782"/>
+            <a:ext cx="12207367" cy="7121236"/>
+            <a:chOff x="-15367" y="-401782"/>
+            <a:chExt cx="12207367" cy="7121236"/>
+          </a:xfrm>
+        </p:grpSpPr>
+        <p:sp>
+          <p:nvSpPr>
+            <p:cNvPr id="37" name="Rectangle 36">
+              <a:extLst>
+                <a:ext uri="{FF2B5EF4-FFF2-40B4-BE49-F238E27FC236}">
+                  <a16:creationId xmlns:a16="http://schemas.microsoft.com/office/drawing/2014/main" id="{F51D1A36-D652-0641-5187-DEAB054DC707}"/>
+                </a:ext>
+              </a:extLst>
+            </p:cNvPr>
+            <p:cNvSpPr/>
+            <p:nvPr/>
+          </p:nvSpPr>
+          <p:spPr>
+            <a:xfrm>
+              <a:off x="0" y="-401782"/>
+              <a:ext cx="12192000" cy="7121236"/>
+            </a:xfrm>
+            <a:prstGeom prst="rect">
+              <a:avLst/>
+            </a:prstGeom>
+            <a:solidFill>
+              <a:schemeClr val="bg1"/>
+            </a:solidFill>
+            <a:ln>
+              <a:noFill/>
+            </a:ln>
+          </p:spPr>
+          <p:style>
+            <a:lnRef idx="2">
+              <a:schemeClr val="accent1">
+                <a:shade val="15000"/>
+              </a:schemeClr>
+            </a:lnRef>
+            <a:fillRef idx="1">
+              <a:schemeClr val="accent1"/>
+            </a:fillRef>
+            <a:effectRef idx="0">
+              <a:schemeClr val="accent1"/>
+            </a:effectRef>
+            <a:fontRef idx="minor">
+              <a:schemeClr val="lt1"/>
+            </a:fontRef>
+          </p:style>
+          <p:txBody>
+            <a:bodyPr rtlCol="0" anchor="ctr"/>
+            <a:lstStyle/>
+            <a:p>
+              <a:pPr algn="ctr"/>
+              <a:endParaRPr lang="en-CA"/>
+            </a:p>
+          </p:txBody>
+        </p:sp>
+        <p:pic>
+          <p:nvPicPr>
+            <p:cNvPr id="9" name="Picture 8" descr="A graph of a temperature&#10;&#10;Description automatically generated with medium confidence">
+              <a:extLst>
+                <a:ext uri="{FF2B5EF4-FFF2-40B4-BE49-F238E27FC236}">
+                  <a16:creationId xmlns:a16="http://schemas.microsoft.com/office/drawing/2014/main" id="{31A01363-82B8-2209-0D27-B0228C1BD001}"/>
+                </a:ext>
+              </a:extLst>
+            </p:cNvPr>
+            <p:cNvPicPr>
+              <a:picLocks noChangeAspect="1"/>
+            </p:cNvPicPr>
+            <p:nvPr/>
+          </p:nvPicPr>
+          <p:blipFill>
+            <a:blip r:embed="rId2"/>
+            <a:srcRect l="3283" t="15465" r="3283" b="2811"/>
+            <a:stretch/>
+          </p:blipFill>
+          <p:spPr>
+            <a:xfrm>
+              <a:off x="5936517" y="1032889"/>
+              <a:ext cx="5894709" cy="5604623"/>
+            </a:xfrm>
+            <a:prstGeom prst="rect">
+              <a:avLst/>
+            </a:prstGeom>
+          </p:spPr>
+        </p:pic>
+        <p:pic>
+          <p:nvPicPr>
+            <p:cNvPr id="8" name="Picture 7" descr="A graph of a temperature&#10;&#10;Description automatically generated">
+              <a:extLst>
+                <a:ext uri="{FF2B5EF4-FFF2-40B4-BE49-F238E27FC236}">
+                  <a16:creationId xmlns:a16="http://schemas.microsoft.com/office/drawing/2014/main" id="{6E0B2D5A-D3DE-8906-07BF-1A5C70ECCD3D}"/>
+                </a:ext>
+              </a:extLst>
+            </p:cNvPr>
+            <p:cNvPicPr>
+              <a:picLocks noChangeAspect="1"/>
+            </p:cNvPicPr>
+            <p:nvPr/>
+          </p:nvPicPr>
+          <p:blipFill>
+            <a:blip r:embed="rId3"/>
+            <a:srcRect l="18808" t="6643" r="2897" b="88577"/>
+            <a:stretch/>
+          </p:blipFill>
+          <p:spPr>
+            <a:xfrm>
+              <a:off x="1365293" y="192779"/>
+              <a:ext cx="10826707" cy="650724"/>
+            </a:xfrm>
+            <a:prstGeom prst="rect">
+              <a:avLst/>
+            </a:prstGeom>
+          </p:spPr>
+        </p:pic>
+        <p:sp>
+          <p:nvSpPr>
+            <p:cNvPr id="14" name="TextBox 13">
+              <a:extLst>
+                <a:ext uri="{FF2B5EF4-FFF2-40B4-BE49-F238E27FC236}">
+                  <a16:creationId xmlns:a16="http://schemas.microsoft.com/office/drawing/2014/main" id="{59D1C5B7-079D-3901-BD47-EE45955AF4BC}"/>
+                </a:ext>
+              </a:extLst>
+            </p:cNvPr>
+            <p:cNvSpPr txBox="1"/>
+            <p:nvPr/>
+          </p:nvSpPr>
+          <p:spPr>
+            <a:xfrm>
+              <a:off x="11253104" y="287236"/>
+              <a:ext cx="636713" cy="461665"/>
+            </a:xfrm>
+            <a:prstGeom prst="rect">
+              <a:avLst/>
+            </a:prstGeom>
+            <a:noFill/>
+          </p:spPr>
+          <p:txBody>
+            <a:bodyPr wrap="none" rtlCol="0">
+              <a:spAutoFit/>
+            </a:bodyPr>
+            <a:lstStyle/>
+            <a:p>
+              <a:r>
+                <a:rPr lang="en-CA" sz="2400" b="1" dirty="0">
+                  <a:ln w="3175">
+                    <a:noFill/>
+                  </a:ln>
+                  <a:latin typeface="ROBOTO CONDENSED LIGHT" pitchFamily="2" charset="0"/>
+                  <a:ea typeface="ROBOTO CONDENSED LIGHT" pitchFamily="2" charset="0"/>
+                </a:rPr>
+                <a:t>Full</a:t>
+              </a:r>
+            </a:p>
+          </p:txBody>
+        </p:sp>
+        <p:sp>
+          <p:nvSpPr>
+            <p:cNvPr id="16" name="TextBox 15">
+              <a:extLst>
+                <a:ext uri="{FF2B5EF4-FFF2-40B4-BE49-F238E27FC236}">
+                  <a16:creationId xmlns:a16="http://schemas.microsoft.com/office/drawing/2014/main" id="{07C0C724-E1D0-D22E-D4A3-7BB7A957E5A5}"/>
+                </a:ext>
+              </a:extLst>
+            </p:cNvPr>
+            <p:cNvSpPr txBox="1"/>
+            <p:nvPr/>
+          </p:nvSpPr>
+          <p:spPr>
+            <a:xfrm>
+              <a:off x="5981473" y="287236"/>
+              <a:ext cx="1375698" cy="461665"/>
+            </a:xfrm>
+            <a:prstGeom prst="rect">
+              <a:avLst/>
+            </a:prstGeom>
+            <a:noFill/>
+          </p:spPr>
+          <p:txBody>
+            <a:bodyPr wrap="none" rtlCol="0">
+              <a:spAutoFit/>
+            </a:bodyPr>
+            <a:lstStyle/>
+            <a:p>
+              <a:r>
+                <a:rPr lang="en-CA" sz="2400" b="1" dirty="0">
+                  <a:ln w="3175">
+                    <a:noFill/>
+                  </a:ln>
+                  <a:latin typeface="ROBOTO CONDENSED LIGHT" pitchFamily="2" charset="0"/>
+                  <a:ea typeface="ROBOTO CONDENSED LIGHT" pitchFamily="2" charset="0"/>
+                </a:rPr>
+                <a:t>Moderate</a:t>
+              </a:r>
+            </a:p>
+          </p:txBody>
+        </p:sp>
+        <p:pic>
+          <p:nvPicPr>
+            <p:cNvPr id="18" name="Picture 17" descr="A graph of a temperature&#10;&#10;Description automatically generated">
+              <a:extLst>
+                <a:ext uri="{FF2B5EF4-FFF2-40B4-BE49-F238E27FC236}">
+                  <a16:creationId xmlns:a16="http://schemas.microsoft.com/office/drawing/2014/main" id="{DCF0FCA7-10F9-6FE0-E287-065C663F35C0}"/>
+                </a:ext>
+              </a:extLst>
+            </p:cNvPr>
+            <p:cNvPicPr>
+              <a:picLocks noChangeAspect="1"/>
+            </p:cNvPicPr>
+            <p:nvPr/>
+          </p:nvPicPr>
+          <p:blipFill>
+            <a:blip r:embed="rId4"/>
+            <a:srcRect l="56961" t="60758" r="38021" b="35842"/>
+            <a:stretch/>
+          </p:blipFill>
+          <p:spPr>
+            <a:xfrm>
+              <a:off x="478266" y="293281"/>
+              <a:ext cx="1000800" cy="449573"/>
+            </a:xfrm>
+            <a:prstGeom prst="rect">
+              <a:avLst/>
+            </a:prstGeom>
+          </p:spPr>
+        </p:pic>
+        <p:sp>
+          <p:nvSpPr>
+            <p:cNvPr id="19" name="TextBox 18">
+              <a:extLst>
+                <a:ext uri="{FF2B5EF4-FFF2-40B4-BE49-F238E27FC236}">
+                  <a16:creationId xmlns:a16="http://schemas.microsoft.com/office/drawing/2014/main" id="{798C3255-EF9A-5E74-45FD-163E4A8C2B1C}"/>
+                </a:ext>
+              </a:extLst>
+            </p:cNvPr>
+            <p:cNvSpPr txBox="1"/>
+            <p:nvPr/>
+          </p:nvSpPr>
+          <p:spPr>
+            <a:xfrm>
+              <a:off x="535315" y="277254"/>
+              <a:ext cx="838691" cy="461665"/>
+            </a:xfrm>
+            <a:prstGeom prst="rect">
+              <a:avLst/>
+            </a:prstGeom>
+            <a:noFill/>
+          </p:spPr>
+          <p:txBody>
+            <a:bodyPr wrap="none" rtlCol="0">
+              <a:spAutoFit/>
+            </a:bodyPr>
+            <a:lstStyle/>
+            <a:p>
+              <a:r>
+                <a:rPr lang="en-CA" sz="2400" b="1" dirty="0">
+                  <a:ln w="3175">
+                    <a:noFill/>
+                  </a:ln>
+                  <a:latin typeface="ROBOTO CONDENSED LIGHT" pitchFamily="2" charset="0"/>
+                  <a:ea typeface="ROBOTO CONDENSED LIGHT" pitchFamily="2" charset="0"/>
+                </a:rPr>
+                <a:t>None</a:t>
+              </a:r>
+            </a:p>
+          </p:txBody>
+        </p:sp>
+        <p:pic>
+          <p:nvPicPr>
+            <p:cNvPr id="3" name="Picture 2" descr="A map of canada with different colors&#10;&#10;Description automatically generated">
+              <a:extLst>
+                <a:ext uri="{FF2B5EF4-FFF2-40B4-BE49-F238E27FC236}">
+                  <a16:creationId xmlns:a16="http://schemas.microsoft.com/office/drawing/2014/main" id="{B5B140B9-9FCC-501F-76D6-913FB56EF9F3}"/>
+                </a:ext>
+              </a:extLst>
+            </p:cNvPr>
+            <p:cNvPicPr>
+              <a:picLocks noChangeAspect="1"/>
+            </p:cNvPicPr>
+            <p:nvPr/>
+          </p:nvPicPr>
+          <p:blipFill>
+            <a:blip r:embed="rId5"/>
+            <a:srcRect l="29990" t="24391" r="20292" b="10155"/>
+            <a:stretch/>
+          </p:blipFill>
+          <p:spPr>
+            <a:xfrm>
+              <a:off x="-15367" y="950947"/>
+              <a:ext cx="6794013" cy="5644727"/>
+            </a:xfrm>
+            <a:prstGeom prst="rect">
+              <a:avLst/>
+            </a:prstGeom>
+          </p:spPr>
+        </p:pic>
+        <p:pic>
+          <p:nvPicPr>
+            <p:cNvPr id="32" name="Picture 31" descr="A graph of a temperature&#10;&#10;Description automatically generated">
+              <a:extLst>
+                <a:ext uri="{FF2B5EF4-FFF2-40B4-BE49-F238E27FC236}">
+                  <a16:creationId xmlns:a16="http://schemas.microsoft.com/office/drawing/2014/main" id="{E0AD502B-EA91-BC42-68A4-136F1253AF43}"/>
+                </a:ext>
+              </a:extLst>
+            </p:cNvPr>
+            <p:cNvPicPr>
+              <a:picLocks noChangeAspect="1"/>
+            </p:cNvPicPr>
+            <p:nvPr/>
+          </p:nvPicPr>
+          <p:blipFill>
+            <a:blip r:embed="rId6"/>
+            <a:srcRect l="2248" t="16175" r="90469" b="46150"/>
+            <a:stretch/>
+          </p:blipFill>
+          <p:spPr>
+            <a:xfrm>
+              <a:off x="6167771" y="1196471"/>
+              <a:ext cx="459491" cy="2583746"/>
+            </a:xfrm>
+            <a:prstGeom prst="rect">
+              <a:avLst/>
+            </a:prstGeom>
+          </p:spPr>
+        </p:pic>
+        <p:sp>
+          <p:nvSpPr>
+            <p:cNvPr id="34" name="TextBox 33">
+              <a:extLst>
+                <a:ext uri="{FF2B5EF4-FFF2-40B4-BE49-F238E27FC236}">
+                  <a16:creationId xmlns:a16="http://schemas.microsoft.com/office/drawing/2014/main" id="{E31856AD-F838-8043-D3E4-1D3E552091D6}"/>
+                </a:ext>
+              </a:extLst>
+            </p:cNvPr>
+            <p:cNvSpPr txBox="1"/>
+            <p:nvPr/>
+          </p:nvSpPr>
+          <p:spPr>
+            <a:xfrm>
+              <a:off x="445347" y="1016701"/>
+              <a:ext cx="410690" cy="646331"/>
+            </a:xfrm>
+            <a:prstGeom prst="rect">
+              <a:avLst/>
+            </a:prstGeom>
+            <a:noFill/>
+          </p:spPr>
+          <p:txBody>
+            <a:bodyPr wrap="none" rtlCol="0">
+              <a:spAutoFit/>
+            </a:bodyPr>
+            <a:lstStyle/>
+            <a:p>
+              <a:r>
+                <a:rPr lang="en-CA" sz="3600" b="1" dirty="0">
+                  <a:ln w="3175">
+                    <a:noFill/>
+                  </a:ln>
+                  <a:latin typeface="ROBOTO CONDENSED LIGHT" pitchFamily="2" charset="0"/>
+                  <a:ea typeface="ROBOTO CONDENSED LIGHT" pitchFamily="2" charset="0"/>
+                </a:rPr>
+                <a:t>a</a:t>
+              </a:r>
+            </a:p>
+          </p:txBody>
+        </p:sp>
+        <p:cxnSp>
+          <p:nvCxnSpPr>
+            <p:cNvPr id="29" name="Straight Arrow Connector 28">
+              <a:extLst>
+                <a:ext uri="{FF2B5EF4-FFF2-40B4-BE49-F238E27FC236}">
+                  <a16:creationId xmlns:a16="http://schemas.microsoft.com/office/drawing/2014/main" id="{32D2EC87-DBED-04C9-CA44-4C9E16F52DA9}"/>
+                </a:ext>
+              </a:extLst>
+            </p:cNvPr>
+            <p:cNvCxnSpPr>
+              <a:cxnSpLocks/>
+            </p:cNvCxnSpPr>
+            <p:nvPr/>
+          </p:nvCxnSpPr>
+          <p:spPr>
+            <a:xfrm>
+              <a:off x="8809449" y="3998056"/>
+              <a:ext cx="374754" cy="311717"/>
+            </a:xfrm>
+            <a:prstGeom prst="straightConnector1">
+              <a:avLst/>
+            </a:prstGeom>
+            <a:ln>
+              <a:tailEnd type="triangle"/>
+            </a:ln>
+          </p:spPr>
+          <p:style>
+            <a:lnRef idx="1">
+              <a:schemeClr val="dk1"/>
+            </a:lnRef>
+            <a:fillRef idx="0">
+              <a:schemeClr val="dk1"/>
+            </a:fillRef>
+            <a:effectRef idx="0">
+              <a:schemeClr val="dk1"/>
+            </a:effectRef>
+            <a:fontRef idx="minor">
+              <a:schemeClr val="tx1"/>
+            </a:fontRef>
+          </p:style>
+        </p:cxnSp>
+        <p:sp>
+          <p:nvSpPr>
+            <p:cNvPr id="27" name="TextBox 26">
+              <a:extLst>
+                <a:ext uri="{FF2B5EF4-FFF2-40B4-BE49-F238E27FC236}">
+                  <a16:creationId xmlns:a16="http://schemas.microsoft.com/office/drawing/2014/main" id="{865CFC23-B9B3-EDDC-A6B5-9C9AC3811229}"/>
+                </a:ext>
+              </a:extLst>
+            </p:cNvPr>
+            <p:cNvSpPr txBox="1"/>
+            <p:nvPr/>
+          </p:nvSpPr>
+          <p:spPr>
+            <a:xfrm>
+              <a:off x="7745099" y="3260146"/>
+              <a:ext cx="1827032" cy="954107"/>
+            </a:xfrm>
+            <a:prstGeom prst="rect">
+              <a:avLst/>
+            </a:prstGeom>
+            <a:noFill/>
+          </p:spPr>
+          <p:txBody>
+            <a:bodyPr wrap="square" rtlCol="0">
+              <a:spAutoFit/>
+            </a:bodyPr>
+            <a:lstStyle/>
+            <a:p>
+              <a:r>
+                <a:rPr lang="en-CA" sz="2000" dirty="0">
+                  <a:latin typeface="Roboto Condensed Light" pitchFamily="2" charset="0"/>
+                  <a:ea typeface="Roboto Condensed Light" pitchFamily="2" charset="0"/>
+                </a:rPr>
+                <a:t>Not sampled during BTG </a:t>
+              </a:r>
+              <a:r>
+                <a:rPr lang="en-CA" sz="1600" b="1" dirty="0">
+                  <a:latin typeface="Roboto Condensed Light" pitchFamily="2" charset="0"/>
+                  <a:ea typeface="Roboto Condensed Light" pitchFamily="2" charset="0"/>
+                </a:rPr>
+                <a:t>(outlined)</a:t>
+              </a:r>
+              <a:endParaRPr lang="en-CA" sz="2000" b="1" dirty="0">
+                <a:latin typeface="Roboto Condensed Light" pitchFamily="2" charset="0"/>
+                <a:ea typeface="Roboto Condensed Light" pitchFamily="2" charset="0"/>
+              </a:endParaRPr>
+            </a:p>
+          </p:txBody>
+        </p:sp>
+        <p:sp>
+          <p:nvSpPr>
+            <p:cNvPr id="35" name="TextBox 34">
+              <a:extLst>
+                <a:ext uri="{FF2B5EF4-FFF2-40B4-BE49-F238E27FC236}">
+                  <a16:creationId xmlns:a16="http://schemas.microsoft.com/office/drawing/2014/main" id="{FF14AE52-72EB-31DD-3DD2-CE0B439EA1C2}"/>
+                </a:ext>
+              </a:extLst>
+            </p:cNvPr>
+            <p:cNvSpPr txBox="1"/>
+            <p:nvPr/>
+          </p:nvSpPr>
+          <p:spPr>
+            <a:xfrm>
+              <a:off x="5772121" y="1016701"/>
+              <a:ext cx="418704" cy="646331"/>
+            </a:xfrm>
+            <a:prstGeom prst="rect">
+              <a:avLst/>
+            </a:prstGeom>
+            <a:noFill/>
+            <a:ln>
+              <a:noFill/>
+            </a:ln>
+          </p:spPr>
+          <p:txBody>
+            <a:bodyPr wrap="none" rtlCol="0">
+              <a:spAutoFit/>
+            </a:bodyPr>
+            <a:lstStyle/>
+            <a:p>
+              <a:r>
+                <a:rPr lang="en-CA" sz="3600" b="1" dirty="0">
+                  <a:ln w="3175">
+                    <a:noFill/>
+                  </a:ln>
+                  <a:latin typeface="ROBOTO CONDENSED LIGHT" pitchFamily="2" charset="0"/>
+                  <a:ea typeface="ROBOTO CONDENSED LIGHT" pitchFamily="2" charset="0"/>
+                </a:rPr>
+                <a:t>b</a:t>
+              </a:r>
+            </a:p>
+          </p:txBody>
+        </p:sp>
+        <p:sp>
+          <p:nvSpPr>
+            <p:cNvPr id="21" name="TextBox 20">
+              <a:extLst>
+                <a:ext uri="{FF2B5EF4-FFF2-40B4-BE49-F238E27FC236}">
+                  <a16:creationId xmlns:a16="http://schemas.microsoft.com/office/drawing/2014/main" id="{8FBB3E4B-EA15-AD22-D738-5A6D91EBBAC3}"/>
+                </a:ext>
+              </a:extLst>
+            </p:cNvPr>
+            <p:cNvSpPr txBox="1"/>
+            <p:nvPr/>
+          </p:nvSpPr>
+          <p:spPr>
+            <a:xfrm>
+              <a:off x="413201" y="-280190"/>
+              <a:ext cx="3779947" cy="523220"/>
+            </a:xfrm>
+            <a:prstGeom prst="rect">
+              <a:avLst/>
+            </a:prstGeom>
+            <a:noFill/>
+          </p:spPr>
+          <p:txBody>
+            <a:bodyPr wrap="square" rtlCol="0">
+              <a:spAutoFit/>
+            </a:bodyPr>
+            <a:lstStyle/>
+            <a:p>
+              <a:r>
+                <a:rPr lang="en-CA" sz="2800" b="1" dirty="0">
+                  <a:latin typeface="Roboto Condensed" pitchFamily="2" charset="0"/>
+                  <a:ea typeface="Roboto Condensed" pitchFamily="2" charset="0"/>
+                </a:rPr>
+                <a:t>Climate coverage</a:t>
+              </a:r>
+            </a:p>
+          </p:txBody>
+        </p:sp>
+        <p:sp>
+          <p:nvSpPr>
+            <p:cNvPr id="15" name="TextBox 14">
+              <a:extLst>
+                <a:ext uri="{FF2B5EF4-FFF2-40B4-BE49-F238E27FC236}">
+                  <a16:creationId xmlns:a16="http://schemas.microsoft.com/office/drawing/2014/main" id="{32DB1DA0-71A6-1708-0E41-939F11B60139}"/>
+                </a:ext>
+              </a:extLst>
+            </p:cNvPr>
+            <p:cNvSpPr txBox="1"/>
+            <p:nvPr/>
+          </p:nvSpPr>
+          <p:spPr>
+            <a:xfrm>
+              <a:off x="1581094" y="277254"/>
+              <a:ext cx="769763" cy="461665"/>
+            </a:xfrm>
+            <a:prstGeom prst="rect">
+              <a:avLst/>
+            </a:prstGeom>
+            <a:noFill/>
+          </p:spPr>
+          <p:txBody>
+            <a:bodyPr wrap="none" rtlCol="0">
+              <a:spAutoFit/>
+            </a:bodyPr>
+            <a:lstStyle/>
+            <a:p>
+              <a:r>
+                <a:rPr lang="en-CA" sz="2400" b="1" dirty="0">
+                  <a:ln w="3175">
+                    <a:noFill/>
+                  </a:ln>
+                  <a:latin typeface="ROBOTO CONDENSED LIGHT" pitchFamily="2" charset="0"/>
+                  <a:ea typeface="ROBOTO CONDENSED LIGHT" pitchFamily="2" charset="0"/>
+                </a:rPr>
+                <a:t>Poor</a:t>
+              </a:r>
+            </a:p>
+          </p:txBody>
+        </p:sp>
+      </p:grpSp>
+    </p:spTree>
+    <p:extLst>
+      <p:ext uri="{BB962C8B-B14F-4D97-AF65-F5344CB8AC3E}">
+        <p14:creationId xmlns:p14="http://schemas.microsoft.com/office/powerpoint/2010/main" val="1532776810"/>
+      </p:ext>
+    </p:extLst>
+  </p:cSld>
+  <p:clrMapOvr>
+    <a:masterClrMapping/>
+  </p:clrMapOvr>
+</p:sld>
+</file>
+
+<file path=ppt/slides/slide3.xml><?xml version="1.0" encoding="utf-8"?>
+<p:sld xmlns:a="http://schemas.openxmlformats.org/drawingml/2006/main" xmlns:r="http://schemas.openxmlformats.org/officeDocument/2006/relationships" xmlns:p="http://schemas.openxmlformats.org/presentationml/2006/main">
+  <p:cSld>
+    <p:spTree>
+      <p:nvGrpSpPr>
+        <p:cNvPr id="1" name="">
+          <a:extLst>
+            <a:ext uri="{FF2B5EF4-FFF2-40B4-BE49-F238E27FC236}">
+              <a16:creationId xmlns:a16="http://schemas.microsoft.com/office/drawing/2014/main" id="{709B5EA9-8A69-BA10-42F5-EF7CE9D6CDEC}"/>
+            </a:ext>
+          </a:extLst>
+        </p:cNvPr>
+        <p:cNvGrpSpPr/>
+        <p:nvPr/>
+      </p:nvGrpSpPr>
+      <p:grpSpPr>
+        <a:xfrm>
+          <a:off x="0" y="0"/>
+          <a:ext cx="0" cy="0"/>
+          <a:chOff x="0" y="0"/>
+          <a:chExt cx="0" cy="0"/>
+        </a:xfrm>
+      </p:grpSpPr>
+      <p:sp>
+        <p:nvSpPr>
+          <p:cNvPr id="37" name="Rectangle 36">
+            <a:extLst>
+              <a:ext uri="{FF2B5EF4-FFF2-40B4-BE49-F238E27FC236}">
+                <a16:creationId xmlns:a16="http://schemas.microsoft.com/office/drawing/2014/main" id="{6D8EC6A7-5864-B9E7-0757-111236432AC1}"/>
+              </a:ext>
+            </a:extLst>
+          </p:cNvPr>
+          <p:cNvSpPr/>
+          <p:nvPr/>
+        </p:nvSpPr>
+        <p:spPr>
+          <a:xfrm>
+            <a:off x="0" y="-401783"/>
+            <a:ext cx="12192000" cy="18464041"/>
+          </a:xfrm>
+          <a:prstGeom prst="rect">
+            <a:avLst/>
+          </a:prstGeom>
+          <a:solidFill>
+            <a:schemeClr val="bg1"/>
+          </a:solidFill>
+          <a:ln>
+            <a:noFill/>
+          </a:ln>
+        </p:spPr>
+        <p:style>
+          <a:lnRef idx="2">
+            <a:schemeClr val="accent1">
+              <a:shade val="15000"/>
+            </a:schemeClr>
+          </a:lnRef>
+          <a:fillRef idx="1">
+            <a:schemeClr val="accent1"/>
+          </a:fillRef>
+          <a:effectRef idx="0">
+            <a:schemeClr val="accent1"/>
+          </a:effectRef>
+          <a:fontRef idx="minor">
+            <a:schemeClr val="lt1"/>
+          </a:fontRef>
+        </p:style>
+        <p:txBody>
+          <a:bodyPr rtlCol="0" anchor="ctr"/>
+          <a:lstStyle/>
+          <a:p>
+            <a:pPr algn="ctr"/>
+            <a:endParaRPr lang="en-CA"/>
+          </a:p>
+        </p:txBody>
+      </p:sp>
+      <p:pic>
+        <p:nvPicPr>
+          <p:cNvPr id="9" name="Picture 8" descr="A graph of a temperature&#10;&#10;Description automatically generated with medium confidence">
+            <a:extLst>
+              <a:ext uri="{FF2B5EF4-FFF2-40B4-BE49-F238E27FC236}">
+                <a16:creationId xmlns:a16="http://schemas.microsoft.com/office/drawing/2014/main" id="{7382F44A-D1F6-9F10-F071-99E836072D3A}"/>
+              </a:ext>
+            </a:extLst>
+          </p:cNvPr>
+          <p:cNvPicPr>
+            <a:picLocks noChangeAspect="1"/>
+          </p:cNvPicPr>
+          <p:nvPr/>
+        </p:nvPicPr>
+        <p:blipFill>
+          <a:blip r:embed="rId2"/>
+          <a:srcRect l="3283" t="15465" r="3283" b="2811"/>
+          <a:stretch/>
+        </p:blipFill>
+        <p:spPr>
+          <a:xfrm>
+            <a:off x="1581094" y="9229331"/>
+            <a:ext cx="9290106" cy="8832928"/>
+          </a:xfrm>
+          <a:prstGeom prst="rect">
+            <a:avLst/>
+          </a:prstGeom>
+        </p:spPr>
+      </p:pic>
+      <p:pic>
+        <p:nvPicPr>
+          <p:cNvPr id="8" name="Picture 7" descr="A graph of a temperature&#10;&#10;Description automatically generated">
+            <a:extLst>
+              <a:ext uri="{FF2B5EF4-FFF2-40B4-BE49-F238E27FC236}">
+                <a16:creationId xmlns:a16="http://schemas.microsoft.com/office/drawing/2014/main" id="{9ACCCEEF-2878-4076-8366-23619CD65BF6}"/>
+              </a:ext>
+            </a:extLst>
+          </p:cNvPr>
+          <p:cNvPicPr>
+            <a:picLocks noChangeAspect="1"/>
+          </p:cNvPicPr>
+          <p:nvPr/>
+        </p:nvPicPr>
+        <p:blipFill>
+          <a:blip r:embed="rId3"/>
+          <a:srcRect l="18808" t="6643" r="2897" b="88577"/>
+          <a:stretch/>
+        </p:blipFill>
+        <p:spPr>
+          <a:xfrm>
+            <a:off x="1365293" y="192779"/>
+            <a:ext cx="10826707" cy="650724"/>
+          </a:xfrm>
+          <a:prstGeom prst="rect">
+            <a:avLst/>
+          </a:prstGeom>
+        </p:spPr>
+      </p:pic>
+      <p:sp>
+        <p:nvSpPr>
+          <p:cNvPr id="14" name="TextBox 13">
+            <a:extLst>
+              <a:ext uri="{FF2B5EF4-FFF2-40B4-BE49-F238E27FC236}">
+                <a16:creationId xmlns:a16="http://schemas.microsoft.com/office/drawing/2014/main" id="{31CB4389-059A-E7FD-B86C-FA442FDF824E}"/>
+              </a:ext>
+            </a:extLst>
+          </p:cNvPr>
+          <p:cNvSpPr txBox="1"/>
+          <p:nvPr/>
+        </p:nvSpPr>
+        <p:spPr>
+          <a:xfrm>
+            <a:off x="11253104" y="287236"/>
+            <a:ext cx="636713" cy="461665"/>
+          </a:xfrm>
+          <a:prstGeom prst="rect">
+            <a:avLst/>
+          </a:prstGeom>
+          <a:noFill/>
+        </p:spPr>
+        <p:txBody>
+          <a:bodyPr wrap="none" rtlCol="0">
+            <a:spAutoFit/>
+          </a:bodyPr>
+          <a:lstStyle/>
+          <a:p>
+            <a:r>
+              <a:rPr lang="en-CA" sz="2400" b="1" dirty="0">
+                <a:ln w="3175">
+                  <a:noFill/>
+                </a:ln>
+                <a:latin typeface="ROBOTO CONDENSED LIGHT" pitchFamily="2" charset="0"/>
+                <a:ea typeface="ROBOTO CONDENSED LIGHT" pitchFamily="2" charset="0"/>
+              </a:rPr>
+              <a:t>Full</a:t>
+            </a:r>
+          </a:p>
+        </p:txBody>
+      </p:sp>
+      <p:sp>
+        <p:nvSpPr>
+          <p:cNvPr id="16" name="TextBox 15">
+            <a:extLst>
+              <a:ext uri="{FF2B5EF4-FFF2-40B4-BE49-F238E27FC236}">
+                <a16:creationId xmlns:a16="http://schemas.microsoft.com/office/drawing/2014/main" id="{D2AC6B58-5914-C825-A31D-F76A99C1E570}"/>
+              </a:ext>
+            </a:extLst>
+          </p:cNvPr>
+          <p:cNvSpPr txBox="1"/>
+          <p:nvPr/>
+        </p:nvSpPr>
+        <p:spPr>
+          <a:xfrm>
+            <a:off x="5981473" y="287236"/>
+            <a:ext cx="1375698" cy="461665"/>
+          </a:xfrm>
+          <a:prstGeom prst="rect">
+            <a:avLst/>
+          </a:prstGeom>
+          <a:noFill/>
+        </p:spPr>
+        <p:txBody>
+          <a:bodyPr wrap="none" rtlCol="0">
+            <a:spAutoFit/>
+          </a:bodyPr>
+          <a:lstStyle/>
+          <a:p>
+            <a:r>
+              <a:rPr lang="en-CA" sz="2400" b="1" dirty="0">
+                <a:ln w="3175">
+                  <a:noFill/>
+                </a:ln>
+                <a:latin typeface="ROBOTO CONDENSED LIGHT" pitchFamily="2" charset="0"/>
+                <a:ea typeface="ROBOTO CONDENSED LIGHT" pitchFamily="2" charset="0"/>
+              </a:rPr>
+              <a:t>Moderate</a:t>
+            </a:r>
+          </a:p>
+        </p:txBody>
+      </p:sp>
+      <p:pic>
+        <p:nvPicPr>
+          <p:cNvPr id="18" name="Picture 17" descr="A graph of a temperature&#10;&#10;Description automatically generated">
+            <a:extLst>
+              <a:ext uri="{FF2B5EF4-FFF2-40B4-BE49-F238E27FC236}">
+                <a16:creationId xmlns:a16="http://schemas.microsoft.com/office/drawing/2014/main" id="{9E08D678-7348-CD89-205A-AFE390E4829D}"/>
+              </a:ext>
+            </a:extLst>
+          </p:cNvPr>
+          <p:cNvPicPr>
+            <a:picLocks noChangeAspect="1"/>
+          </p:cNvPicPr>
+          <p:nvPr/>
+        </p:nvPicPr>
+        <p:blipFill>
+          <a:blip r:embed="rId4"/>
+          <a:srcRect l="56961" t="60758" r="38021" b="35842"/>
+          <a:stretch/>
+        </p:blipFill>
+        <p:spPr>
+          <a:xfrm>
+            <a:off x="478266" y="293281"/>
+            <a:ext cx="1000800" cy="449573"/>
+          </a:xfrm>
+          <a:prstGeom prst="rect">
+            <a:avLst/>
+          </a:prstGeom>
+        </p:spPr>
+      </p:pic>
+      <p:sp>
+        <p:nvSpPr>
+          <p:cNvPr id="19" name="TextBox 18">
+            <a:extLst>
+              <a:ext uri="{FF2B5EF4-FFF2-40B4-BE49-F238E27FC236}">
+                <a16:creationId xmlns:a16="http://schemas.microsoft.com/office/drawing/2014/main" id="{9E1071D6-FCA3-DF55-0A19-B4DC5D18BD9B}"/>
+              </a:ext>
+            </a:extLst>
+          </p:cNvPr>
+          <p:cNvSpPr txBox="1"/>
+          <p:nvPr/>
+        </p:nvSpPr>
+        <p:spPr>
+          <a:xfrm>
+            <a:off x="535315" y="277254"/>
+            <a:ext cx="838691" cy="461665"/>
+          </a:xfrm>
+          <a:prstGeom prst="rect">
+            <a:avLst/>
+          </a:prstGeom>
+          <a:noFill/>
+        </p:spPr>
+        <p:txBody>
+          <a:bodyPr wrap="none" rtlCol="0">
+            <a:spAutoFit/>
+          </a:bodyPr>
+          <a:lstStyle/>
+          <a:p>
+            <a:r>
+              <a:rPr lang="en-CA" sz="2400" b="1" dirty="0">
+                <a:ln w="3175">
+                  <a:noFill/>
+                </a:ln>
+                <a:latin typeface="ROBOTO CONDENSED LIGHT" pitchFamily="2" charset="0"/>
+                <a:ea typeface="ROBOTO CONDENSED LIGHT" pitchFamily="2" charset="0"/>
+              </a:rPr>
+              <a:t>None</a:t>
+            </a:r>
+          </a:p>
+        </p:txBody>
+      </p:sp>
+      <p:pic>
+        <p:nvPicPr>
+          <p:cNvPr id="3" name="Picture 2" descr="A map of canada with different colors&#10;&#10;Description automatically generated">
+            <a:extLst>
+              <a:ext uri="{FF2B5EF4-FFF2-40B4-BE49-F238E27FC236}">
+                <a16:creationId xmlns:a16="http://schemas.microsoft.com/office/drawing/2014/main" id="{D7C09D20-6C47-0943-D722-00E54881DCE1}"/>
+              </a:ext>
+            </a:extLst>
+          </p:cNvPr>
+          <p:cNvPicPr>
+            <a:picLocks noChangeAspect="1"/>
+          </p:cNvPicPr>
+          <p:nvPr/>
+        </p:nvPicPr>
+        <p:blipFill>
+          <a:blip r:embed="rId5"/>
+          <a:srcRect l="29990" t="24391" r="20292" b="10155"/>
+          <a:stretch/>
+        </p:blipFill>
+        <p:spPr>
+          <a:xfrm>
+            <a:off x="1515808" y="877727"/>
+            <a:ext cx="9661046" cy="8026768"/>
+          </a:xfrm>
+          <a:prstGeom prst="rect">
+            <a:avLst/>
+          </a:prstGeom>
+        </p:spPr>
+      </p:pic>
+      <p:sp>
+        <p:nvSpPr>
+          <p:cNvPr id="34" name="TextBox 33">
+            <a:extLst>
+              <a:ext uri="{FF2B5EF4-FFF2-40B4-BE49-F238E27FC236}">
+                <a16:creationId xmlns:a16="http://schemas.microsoft.com/office/drawing/2014/main" id="{4D3F7D65-00E2-B6F9-81CC-AB116D9891E0}"/>
+              </a:ext>
+            </a:extLst>
+          </p:cNvPr>
+          <p:cNvSpPr txBox="1"/>
+          <p:nvPr/>
+        </p:nvSpPr>
+        <p:spPr>
+          <a:xfrm>
+            <a:off x="445347" y="1016701"/>
+            <a:ext cx="410690" cy="646331"/>
+          </a:xfrm>
+          <a:prstGeom prst="rect">
+            <a:avLst/>
+          </a:prstGeom>
+          <a:noFill/>
+        </p:spPr>
+        <p:txBody>
+          <a:bodyPr wrap="none" rtlCol="0">
+            <a:spAutoFit/>
+          </a:bodyPr>
+          <a:lstStyle/>
+          <a:p>
+            <a:r>
+              <a:rPr lang="en-CA" sz="3600" b="1" dirty="0">
+                <a:ln w="3175">
+                  <a:noFill/>
+                </a:ln>
+                <a:latin typeface="ROBOTO CONDENSED LIGHT" pitchFamily="2" charset="0"/>
+                <a:ea typeface="ROBOTO CONDENSED LIGHT" pitchFamily="2" charset="0"/>
+              </a:rPr>
+              <a:t>a</a:t>
+            </a:r>
+          </a:p>
+        </p:txBody>
+      </p:sp>
+      <p:sp>
+        <p:nvSpPr>
+          <p:cNvPr id="27" name="TextBox 26">
+            <a:extLst>
+              <a:ext uri="{FF2B5EF4-FFF2-40B4-BE49-F238E27FC236}">
+                <a16:creationId xmlns:a16="http://schemas.microsoft.com/office/drawing/2014/main" id="{CBBCB988-8BFC-A717-B40D-F1F69E30401B}"/>
+              </a:ext>
+            </a:extLst>
+          </p:cNvPr>
+          <p:cNvSpPr txBox="1"/>
+          <p:nvPr/>
+        </p:nvSpPr>
+        <p:spPr>
+          <a:xfrm>
+            <a:off x="5284909" y="17861368"/>
+            <a:ext cx="5452997" cy="523220"/>
+          </a:xfrm>
+          <a:prstGeom prst="rect">
+            <a:avLst/>
+          </a:prstGeom>
+          <a:noFill/>
+        </p:spPr>
+        <p:txBody>
+          <a:bodyPr wrap="square" rtlCol="0">
+            <a:spAutoFit/>
+          </a:bodyPr>
+          <a:lstStyle/>
+          <a:p>
+            <a:pPr algn="r"/>
+            <a:r>
+              <a:rPr lang="en-CA" sz="2800" dirty="0">
+                <a:latin typeface="Roboto Condensed Light" pitchFamily="2" charset="0"/>
+                <a:ea typeface="Roboto Condensed Light" pitchFamily="2" charset="0"/>
+              </a:rPr>
+              <a:t>Outline: Not sampled during BTG</a:t>
+            </a:r>
+          </a:p>
+        </p:txBody>
+      </p:sp>
+      <p:sp>
+        <p:nvSpPr>
+          <p:cNvPr id="35" name="TextBox 34">
+            <a:extLst>
+              <a:ext uri="{FF2B5EF4-FFF2-40B4-BE49-F238E27FC236}">
+                <a16:creationId xmlns:a16="http://schemas.microsoft.com/office/drawing/2014/main" id="{3BBC366D-051F-3E44-DBFF-5CDC3DFE3CB3}"/>
+              </a:ext>
+            </a:extLst>
+          </p:cNvPr>
+          <p:cNvSpPr txBox="1"/>
+          <p:nvPr/>
+        </p:nvSpPr>
+        <p:spPr>
+          <a:xfrm>
+            <a:off x="413201" y="8813527"/>
+            <a:ext cx="418704" cy="646331"/>
+          </a:xfrm>
+          <a:prstGeom prst="rect">
+            <a:avLst/>
+          </a:prstGeom>
+          <a:noFill/>
+          <a:ln>
+            <a:noFill/>
+          </a:ln>
+        </p:spPr>
+        <p:txBody>
+          <a:bodyPr wrap="none" rtlCol="0">
+            <a:spAutoFit/>
+          </a:bodyPr>
+          <a:lstStyle/>
+          <a:p>
+            <a:r>
+              <a:rPr lang="en-CA" sz="3600" b="1" dirty="0">
+                <a:ln w="3175">
+                  <a:noFill/>
+                </a:ln>
+                <a:latin typeface="ROBOTO CONDENSED LIGHT" pitchFamily="2" charset="0"/>
+                <a:ea typeface="ROBOTO CONDENSED LIGHT" pitchFamily="2" charset="0"/>
+              </a:rPr>
+              <a:t>b</a:t>
+            </a:r>
+          </a:p>
+        </p:txBody>
+      </p:sp>
+      <p:sp>
+        <p:nvSpPr>
+          <p:cNvPr id="21" name="TextBox 20">
+            <a:extLst>
+              <a:ext uri="{FF2B5EF4-FFF2-40B4-BE49-F238E27FC236}">
+                <a16:creationId xmlns:a16="http://schemas.microsoft.com/office/drawing/2014/main" id="{3EF2C41C-4143-5598-B8EB-7D425BD5E62A}"/>
+              </a:ext>
+            </a:extLst>
+          </p:cNvPr>
+          <p:cNvSpPr txBox="1"/>
+          <p:nvPr/>
+        </p:nvSpPr>
+        <p:spPr>
+          <a:xfrm>
+            <a:off x="413201" y="-280190"/>
+            <a:ext cx="3779947" cy="523220"/>
+          </a:xfrm>
+          <a:prstGeom prst="rect">
+            <a:avLst/>
+          </a:prstGeom>
+          <a:noFill/>
+        </p:spPr>
+        <p:txBody>
+          <a:bodyPr wrap="square" rtlCol="0">
+            <a:spAutoFit/>
+          </a:bodyPr>
+          <a:lstStyle/>
+          <a:p>
+            <a:r>
+              <a:rPr lang="en-CA" sz="2800" b="1" dirty="0">
+                <a:latin typeface="Roboto Condensed" pitchFamily="2" charset="0"/>
+                <a:ea typeface="Roboto Condensed" pitchFamily="2" charset="0"/>
+              </a:rPr>
+              <a:t>Climate coverage</a:t>
+            </a:r>
+          </a:p>
+        </p:txBody>
+      </p:sp>
+      <p:sp>
+        <p:nvSpPr>
+          <p:cNvPr id="15" name="TextBox 14">
+            <a:extLst>
+              <a:ext uri="{FF2B5EF4-FFF2-40B4-BE49-F238E27FC236}">
+                <a16:creationId xmlns:a16="http://schemas.microsoft.com/office/drawing/2014/main" id="{0E509C46-A287-458E-B098-0BB4DC97A922}"/>
+              </a:ext>
+            </a:extLst>
+          </p:cNvPr>
+          <p:cNvSpPr txBox="1"/>
+          <p:nvPr/>
+        </p:nvSpPr>
+        <p:spPr>
+          <a:xfrm>
+            <a:off x="1581094" y="277254"/>
+            <a:ext cx="769763" cy="461665"/>
+          </a:xfrm>
+          <a:prstGeom prst="rect">
+            <a:avLst/>
+          </a:prstGeom>
+          <a:noFill/>
+        </p:spPr>
+        <p:txBody>
+          <a:bodyPr wrap="none" rtlCol="0">
+            <a:spAutoFit/>
+          </a:bodyPr>
+          <a:lstStyle/>
+          <a:p>
+            <a:r>
+              <a:rPr lang="en-CA" sz="2400" b="1" dirty="0">
+                <a:ln w="3175">
+                  <a:noFill/>
+                </a:ln>
+                <a:latin typeface="ROBOTO CONDENSED LIGHT" pitchFamily="2" charset="0"/>
+                <a:ea typeface="ROBOTO CONDENSED LIGHT" pitchFamily="2" charset="0"/>
+              </a:rPr>
+              <a:t>Poor</a:t>
+            </a:r>
+          </a:p>
+        </p:txBody>
+      </p:sp>
+    </p:spTree>
+    <p:extLst>
+      <p:ext uri="{BB962C8B-B14F-4D97-AF65-F5344CB8AC3E}">
+        <p14:creationId xmlns:p14="http://schemas.microsoft.com/office/powerpoint/2010/main" val="1226371357"/>
+      </p:ext>
+    </p:extLst>
+  </p:cSld>
+  <p:clrMapOvr>
+    <a:masterClrMapping/>
+  </p:clrMapOvr>
+</p:sld>
+</file>
+
+<file path=ppt/slides/slide4.xml><?xml version="1.0" encoding="utf-8"?>
 <p:sld xmlns:a="http://schemas.openxmlformats.org/drawingml/2006/main" xmlns:r="http://schemas.openxmlformats.org/officeDocument/2006/relationships" xmlns:p="http://schemas.openxmlformats.org/presentationml/2006/main">
   <p:cSld>
     <p:spTree>
@@ -4232,7 +6035,7 @@
 </p:sld>
 </file>
 
-<file path=ppt/slides/slide2.xml><?xml version="1.0" encoding="utf-8"?>
+<file path=ppt/slides/slide5.xml><?xml version="1.0" encoding="utf-8"?>
 <p:sld xmlns:a="http://schemas.openxmlformats.org/drawingml/2006/main" xmlns:r="http://schemas.openxmlformats.org/officeDocument/2006/relationships" xmlns:p="http://schemas.openxmlformats.org/presentationml/2006/main">
   <p:cSld>
     <p:spTree>
@@ -5320,7 +7123,7 @@
 </p:sld>
 </file>
 
-<file path=ppt/slides/slide3.xml><?xml version="1.0" encoding="utf-8"?>
+<file path=ppt/slides/slide6.xml><?xml version="1.0" encoding="utf-8"?>
 <p:sld xmlns:a="http://schemas.openxmlformats.org/drawingml/2006/main" xmlns:r="http://schemas.openxmlformats.org/officeDocument/2006/relationships" xmlns:p="http://schemas.openxmlformats.org/presentationml/2006/main">
   <p:cSld>
     <p:spTree>
@@ -6685,7 +8488,7 @@
 </p:sld>
 </file>
 
-<file path=ppt/slides/slide4.xml><?xml version="1.0" encoding="utf-8"?>
+<file path=ppt/slides/slide7.xml><?xml version="1.0" encoding="utf-8"?>
 <p:sld xmlns:a="http://schemas.openxmlformats.org/drawingml/2006/main" xmlns:r="http://schemas.openxmlformats.org/officeDocument/2006/relationships" xmlns:p="http://schemas.openxmlformats.org/presentationml/2006/main">
   <p:cSld>
     <p:spTree>

--- a/figures/manual-edits/manuel-edits-climgap.pptx
+++ b/figures/manual-edits/manuel-edits-climgap.pptx
@@ -203,7 +203,7 @@
           <a:p>
             <a:fld id="{C23D2418-4917-7546-93DC-DC17F4B3C1F3}" type="datetimeFigureOut">
               <a:rPr lang="en-CA" smtClean="0"/>
-              <a:t>2026-06-11</a:t>
+              <a:t>2026-06-25</a:t>
             </a:fld>
             <a:endParaRPr lang="en-CA"/>
           </a:p>
@@ -842,7 +842,7 @@
           <a:p>
             <a:fld id="{7EB4ECC6-0683-4148-99E6-87DFB0CAA85B}" type="datetimeFigureOut">
               <a:rPr lang="en-CA" smtClean="0"/>
-              <a:t>2026-06-11</a:t>
+              <a:t>2026-06-25</a:t>
             </a:fld>
             <a:endParaRPr lang="en-CA"/>
           </a:p>
@@ -1042,7 +1042,7 @@
           <a:p>
             <a:fld id="{7EB4ECC6-0683-4148-99E6-87DFB0CAA85B}" type="datetimeFigureOut">
               <a:rPr lang="en-CA" smtClean="0"/>
-              <a:t>2026-06-11</a:t>
+              <a:t>2026-06-25</a:t>
             </a:fld>
             <a:endParaRPr lang="en-CA"/>
           </a:p>
@@ -1252,7 +1252,7 @@
           <a:p>
             <a:fld id="{7EB4ECC6-0683-4148-99E6-87DFB0CAA85B}" type="datetimeFigureOut">
               <a:rPr lang="en-CA" smtClean="0"/>
-              <a:t>2026-06-11</a:t>
+              <a:t>2026-06-25</a:t>
             </a:fld>
             <a:endParaRPr lang="en-CA"/>
           </a:p>
@@ -1452,7 +1452,7 @@
           <a:p>
             <a:fld id="{7EB4ECC6-0683-4148-99E6-87DFB0CAA85B}" type="datetimeFigureOut">
               <a:rPr lang="en-CA" smtClean="0"/>
-              <a:t>2026-06-11</a:t>
+              <a:t>2026-06-25</a:t>
             </a:fld>
             <a:endParaRPr lang="en-CA"/>
           </a:p>
@@ -1728,7 +1728,7 @@
           <a:p>
             <a:fld id="{7EB4ECC6-0683-4148-99E6-87DFB0CAA85B}" type="datetimeFigureOut">
               <a:rPr lang="en-CA" smtClean="0"/>
-              <a:t>2026-06-11</a:t>
+              <a:t>2026-06-25</a:t>
             </a:fld>
             <a:endParaRPr lang="en-CA"/>
           </a:p>
@@ -1996,7 +1996,7 @@
           <a:p>
             <a:fld id="{7EB4ECC6-0683-4148-99E6-87DFB0CAA85B}" type="datetimeFigureOut">
               <a:rPr lang="en-CA" smtClean="0"/>
-              <a:t>2026-06-11</a:t>
+              <a:t>2026-06-25</a:t>
             </a:fld>
             <a:endParaRPr lang="en-CA"/>
           </a:p>
@@ -2411,7 +2411,7 @@
           <a:p>
             <a:fld id="{7EB4ECC6-0683-4148-99E6-87DFB0CAA85B}" type="datetimeFigureOut">
               <a:rPr lang="en-CA" smtClean="0"/>
-              <a:t>2026-06-11</a:t>
+              <a:t>2026-06-25</a:t>
             </a:fld>
             <a:endParaRPr lang="en-CA"/>
           </a:p>
@@ -2553,7 +2553,7 @@
           <a:p>
             <a:fld id="{7EB4ECC6-0683-4148-99E6-87DFB0CAA85B}" type="datetimeFigureOut">
               <a:rPr lang="en-CA" smtClean="0"/>
-              <a:t>2026-06-11</a:t>
+              <a:t>2026-06-25</a:t>
             </a:fld>
             <a:endParaRPr lang="en-CA"/>
           </a:p>
@@ -2666,7 +2666,7 @@
           <a:p>
             <a:fld id="{7EB4ECC6-0683-4148-99E6-87DFB0CAA85B}" type="datetimeFigureOut">
               <a:rPr lang="en-CA" smtClean="0"/>
-              <a:t>2026-06-11</a:t>
+              <a:t>2026-06-25</a:t>
             </a:fld>
             <a:endParaRPr lang="en-CA"/>
           </a:p>
@@ -2979,7 +2979,7 @@
           <a:p>
             <a:fld id="{7EB4ECC6-0683-4148-99E6-87DFB0CAA85B}" type="datetimeFigureOut">
               <a:rPr lang="en-CA" smtClean="0"/>
-              <a:t>2026-06-11</a:t>
+              <a:t>2026-06-25</a:t>
             </a:fld>
             <a:endParaRPr lang="en-CA"/>
           </a:p>
@@ -3268,7 +3268,7 @@
           <a:p>
             <a:fld id="{7EB4ECC6-0683-4148-99E6-87DFB0CAA85B}" type="datetimeFigureOut">
               <a:rPr lang="en-CA" smtClean="0"/>
-              <a:t>2026-06-11</a:t>
+              <a:t>2026-06-25</a:t>
             </a:fld>
             <a:endParaRPr lang="en-CA"/>
           </a:p>
@@ -3511,7 +3511,7 @@
           <a:p>
             <a:fld id="{7EB4ECC6-0683-4148-99E6-87DFB0CAA85B}" type="datetimeFigureOut">
               <a:rPr lang="en-CA" smtClean="0"/>
-              <a:t>2026-06-11</a:t>
+              <a:t>2026-06-25</a:t>
             </a:fld>
             <a:endParaRPr lang="en-CA"/>
           </a:p>
@@ -4373,10 +4373,6 @@
                   </a:rPr>
                   <a:t>Not sampled during BTG</a:t>
                 </a:r>
-                <a:endParaRPr lang="en-CA" sz="2000" dirty="0">
-                  <a:latin typeface="Roboto Condensed Light" pitchFamily="2" charset="0"/>
-                  <a:ea typeface="Roboto Condensed Light" pitchFamily="2" charset="0"/>
-                </a:endParaRPr>
               </a:p>
             </p:txBody>
           </p:sp>
@@ -5749,9 +5745,9 @@
         <p:grpSpPr>
           <a:xfrm>
             <a:off x="-7316322" y="-5626138"/>
-            <a:ext cx="25318402" cy="16437899"/>
+            <a:ext cx="10857949" cy="16437899"/>
             <a:chOff x="-7316322" y="-5626138"/>
-            <a:chExt cx="25318402" cy="16437899"/>
+            <a:chExt cx="10857949" cy="16437899"/>
           </a:xfrm>
         </p:grpSpPr>
         <p:pic>
@@ -5899,40 +5895,6 @@
             </a:p>
           </p:txBody>
         </p:sp>
-        <p:pic>
-          <p:nvPicPr>
-            <p:cNvPr id="16" name="Picture 15" descr="A map of the world&#10;&#10;Description automatically generated">
-              <a:extLst>
-                <a:ext uri="{FF2B5EF4-FFF2-40B4-BE49-F238E27FC236}">
-                  <a16:creationId xmlns:a16="http://schemas.microsoft.com/office/drawing/2014/main" id="{582DBD22-6ABE-CAE8-9077-D582A6141672}"/>
-                </a:ext>
-              </a:extLst>
-            </p:cNvPr>
-            <p:cNvPicPr>
-              <a:picLocks noChangeAspect="1"/>
-            </p:cNvPicPr>
-            <p:nvPr/>
-          </p:nvPicPr>
-          <p:blipFill>
-            <a:blip r:embed="rId5"/>
-            <a:srcRect l="25636" t="2810" r="23680" b="8369"/>
-            <a:stretch/>
-          </p:blipFill>
-          <p:spPr>
-            <a:xfrm>
-              <a:off x="3541627" y="-4819691"/>
-              <a:ext cx="14460453" cy="15631452"/>
-            </a:xfrm>
-            <a:prstGeom prst="rect">
-              <a:avLst/>
-            </a:prstGeom>
-            <a:ln>
-              <a:solidFill>
-                <a:schemeClr val="tx1"/>
-              </a:solidFill>
-            </a:ln>
-          </p:spPr>
-        </p:pic>
         <p:cxnSp>
           <p:nvCxnSpPr>
             <p:cNvPr id="6" name="Straight Arrow Connector 5">
@@ -6022,6 +5984,40 @@
           </p:style>
         </p:cxnSp>
       </p:grpSp>
+      <p:pic>
+        <p:nvPicPr>
+          <p:cNvPr id="3" name="Picture 2" descr="A map of the world&#10;&#10;Description automatically generated">
+            <a:extLst>
+              <a:ext uri="{FF2B5EF4-FFF2-40B4-BE49-F238E27FC236}">
+                <a16:creationId xmlns:a16="http://schemas.microsoft.com/office/drawing/2014/main" id="{1CCF3555-7699-F9B7-D90D-7D44ECF260C4}"/>
+              </a:ext>
+            </a:extLst>
+          </p:cNvPr>
+          <p:cNvPicPr>
+            <a:picLocks noChangeAspect="1"/>
+          </p:cNvPicPr>
+          <p:nvPr/>
+        </p:nvPicPr>
+        <p:blipFill>
+          <a:blip r:embed="rId5"/>
+          <a:srcRect l="27064" t="4706" r="26084" b="8627"/>
+          <a:stretch/>
+        </p:blipFill>
+        <p:spPr>
+          <a:xfrm>
+            <a:off x="3541627" y="-4819691"/>
+            <a:ext cx="13389687" cy="15631452"/>
+          </a:xfrm>
+          <a:prstGeom prst="rect">
+            <a:avLst/>
+          </a:prstGeom>
+          <a:ln>
+            <a:solidFill>
+              <a:schemeClr val="tx1"/>
+            </a:solidFill>
+          </a:ln>
+        </p:spPr>
+      </p:pic>
     </p:spTree>
     <p:extLst>
       <p:ext uri="{BB962C8B-B14F-4D97-AF65-F5344CB8AC3E}">
@@ -6060,10 +6056,10 @@
       </p:grpSpPr>
       <p:grpSp>
         <p:nvGrpSpPr>
-          <p:cNvPr id="37" name="Group 36">
+          <p:cNvPr id="51" name="Group 50">
             <a:extLst>
               <a:ext uri="{FF2B5EF4-FFF2-40B4-BE49-F238E27FC236}">
-                <a16:creationId xmlns:a16="http://schemas.microsoft.com/office/drawing/2014/main" id="{1C0E7710-F850-1B2C-0BCF-1EB91F23A4B6}"/>
+                <a16:creationId xmlns:a16="http://schemas.microsoft.com/office/drawing/2014/main" id="{086B0AE6-5FD0-5D7D-BE07-CBB2EB57A40D}"/>
               </a:ext>
             </a:extLst>
           </p:cNvPr>
@@ -6072,18 +6068,234 @@
         </p:nvGrpSpPr>
         <p:grpSpPr>
           <a:xfrm>
-            <a:off x="-7324053" y="-2465863"/>
-            <a:ext cx="16841538" cy="17374545"/>
-            <a:chOff x="-7324053" y="-2465863"/>
-            <a:chExt cx="16841538" cy="17374545"/>
+            <a:off x="-7391797" y="-2889178"/>
+            <a:ext cx="16835672" cy="17807981"/>
+            <a:chOff x="-7391797" y="-2889178"/>
+            <a:chExt cx="16835672" cy="17807981"/>
           </a:xfrm>
         </p:grpSpPr>
+        <p:sp>
+          <p:nvSpPr>
+            <p:cNvPr id="50" name="Rectangle 49">
+              <a:extLst>
+                <a:ext uri="{FF2B5EF4-FFF2-40B4-BE49-F238E27FC236}">
+                  <a16:creationId xmlns:a16="http://schemas.microsoft.com/office/drawing/2014/main" id="{DC04A44F-8BE6-0582-4A81-AAF3097BEA5F}"/>
+                </a:ext>
+              </a:extLst>
+            </p:cNvPr>
+            <p:cNvSpPr/>
+            <p:nvPr/>
+          </p:nvSpPr>
+          <p:spPr>
+            <a:xfrm>
+              <a:off x="1232198" y="6477971"/>
+              <a:ext cx="8211677" cy="8440832"/>
+            </a:xfrm>
+            <a:prstGeom prst="rect">
+              <a:avLst/>
+            </a:prstGeom>
+            <a:solidFill>
+              <a:schemeClr val="bg1"/>
+            </a:solidFill>
+            <a:ln>
+              <a:solidFill>
+                <a:schemeClr val="tx1"/>
+              </a:solidFill>
+            </a:ln>
+          </p:spPr>
+          <p:style>
+            <a:lnRef idx="2">
+              <a:schemeClr val="accent1">
+                <a:shade val="15000"/>
+              </a:schemeClr>
+            </a:lnRef>
+            <a:fillRef idx="1">
+              <a:schemeClr val="accent1"/>
+            </a:fillRef>
+            <a:effectRef idx="0">
+              <a:schemeClr val="accent1"/>
+            </a:effectRef>
+            <a:fontRef idx="minor">
+              <a:schemeClr val="lt1"/>
+            </a:fontRef>
+          </p:style>
+          <p:txBody>
+            <a:bodyPr rtlCol="0" anchor="ctr"/>
+            <a:lstStyle/>
+            <a:p>
+              <a:pPr algn="ctr"/>
+              <a:endParaRPr lang="en-CA"/>
+            </a:p>
+          </p:txBody>
+        </p:sp>
+        <p:sp>
+          <p:nvSpPr>
+            <p:cNvPr id="49" name="Rectangle 48">
+              <a:extLst>
+                <a:ext uri="{FF2B5EF4-FFF2-40B4-BE49-F238E27FC236}">
+                  <a16:creationId xmlns:a16="http://schemas.microsoft.com/office/drawing/2014/main" id="{34E3DC0A-4B6F-EDFF-B77A-E8939EF23250}"/>
+                </a:ext>
+              </a:extLst>
+            </p:cNvPr>
+            <p:cNvSpPr/>
+            <p:nvPr/>
+          </p:nvSpPr>
+          <p:spPr>
+            <a:xfrm>
+              <a:off x="-7339225" y="6477971"/>
+              <a:ext cx="8211677" cy="8440832"/>
+            </a:xfrm>
+            <a:prstGeom prst="rect">
+              <a:avLst/>
+            </a:prstGeom>
+            <a:solidFill>
+              <a:schemeClr val="bg1"/>
+            </a:solidFill>
+            <a:ln>
+              <a:solidFill>
+                <a:schemeClr val="tx1"/>
+              </a:solidFill>
+            </a:ln>
+          </p:spPr>
+          <p:style>
+            <a:lnRef idx="2">
+              <a:schemeClr val="accent1">
+                <a:shade val="15000"/>
+              </a:schemeClr>
+            </a:lnRef>
+            <a:fillRef idx="1">
+              <a:schemeClr val="accent1"/>
+            </a:fillRef>
+            <a:effectRef idx="0">
+              <a:schemeClr val="accent1"/>
+            </a:effectRef>
+            <a:fontRef idx="minor">
+              <a:schemeClr val="lt1"/>
+            </a:fontRef>
+          </p:style>
+          <p:txBody>
+            <a:bodyPr rtlCol="0" anchor="ctr"/>
+            <a:lstStyle/>
+            <a:p>
+              <a:pPr algn="ctr"/>
+              <a:endParaRPr lang="en-CA"/>
+            </a:p>
+          </p:txBody>
+        </p:sp>
+        <p:sp>
+          <p:nvSpPr>
+            <p:cNvPr id="48" name="Rectangle 47">
+              <a:extLst>
+                <a:ext uri="{FF2B5EF4-FFF2-40B4-BE49-F238E27FC236}">
+                  <a16:creationId xmlns:a16="http://schemas.microsoft.com/office/drawing/2014/main" id="{D276987B-D353-44D8-7DB3-CD4C6D178883}"/>
+                </a:ext>
+              </a:extLst>
+            </p:cNvPr>
+            <p:cNvSpPr/>
+            <p:nvPr/>
+          </p:nvSpPr>
+          <p:spPr>
+            <a:xfrm>
+              <a:off x="1224419" y="-2229839"/>
+              <a:ext cx="8211677" cy="8440832"/>
+            </a:xfrm>
+            <a:prstGeom prst="rect">
+              <a:avLst/>
+            </a:prstGeom>
+            <a:solidFill>
+              <a:schemeClr val="bg1"/>
+            </a:solidFill>
+            <a:ln>
+              <a:solidFill>
+                <a:schemeClr val="tx1"/>
+              </a:solidFill>
+            </a:ln>
+          </p:spPr>
+          <p:style>
+            <a:lnRef idx="2">
+              <a:schemeClr val="accent1">
+                <a:shade val="15000"/>
+              </a:schemeClr>
+            </a:lnRef>
+            <a:fillRef idx="1">
+              <a:schemeClr val="accent1"/>
+            </a:fillRef>
+            <a:effectRef idx="0">
+              <a:schemeClr val="accent1"/>
+            </a:effectRef>
+            <a:fontRef idx="minor">
+              <a:schemeClr val="lt1"/>
+            </a:fontRef>
+          </p:style>
+          <p:txBody>
+            <a:bodyPr rtlCol="0" anchor="ctr"/>
+            <a:lstStyle/>
+            <a:p>
+              <a:pPr algn="ctr"/>
+              <a:endParaRPr lang="en-CA"/>
+            </a:p>
+          </p:txBody>
+        </p:sp>
+        <p:sp>
+          <p:nvSpPr>
+            <p:cNvPr id="47" name="Rectangle 46">
+              <a:extLst>
+                <a:ext uri="{FF2B5EF4-FFF2-40B4-BE49-F238E27FC236}">
+                  <a16:creationId xmlns:a16="http://schemas.microsoft.com/office/drawing/2014/main" id="{5B8A9A61-0066-41DF-2A76-02F20DDBD89B}"/>
+                </a:ext>
+              </a:extLst>
+            </p:cNvPr>
+            <p:cNvSpPr/>
+            <p:nvPr/>
+          </p:nvSpPr>
+          <p:spPr>
+            <a:xfrm>
+              <a:off x="-7373380" y="-2238889"/>
+              <a:ext cx="8211677" cy="8440832"/>
+            </a:xfrm>
+            <a:prstGeom prst="rect">
+              <a:avLst/>
+            </a:prstGeom>
+            <a:solidFill>
+              <a:schemeClr val="bg1"/>
+            </a:solidFill>
+            <a:ln>
+              <a:solidFill>
+                <a:schemeClr val="tx1"/>
+              </a:solidFill>
+            </a:ln>
+          </p:spPr>
+          <p:style>
+            <a:lnRef idx="2">
+              <a:schemeClr val="accent1">
+                <a:shade val="15000"/>
+              </a:schemeClr>
+            </a:lnRef>
+            <a:fillRef idx="1">
+              <a:schemeClr val="accent1"/>
+            </a:fillRef>
+            <a:effectRef idx="0">
+              <a:schemeClr val="accent1"/>
+            </a:effectRef>
+            <a:fontRef idx="minor">
+              <a:schemeClr val="lt1"/>
+            </a:fontRef>
+          </p:style>
+          <p:txBody>
+            <a:bodyPr rtlCol="0" anchor="ctr"/>
+            <a:lstStyle/>
+            <a:p>
+              <a:pPr algn="ctr"/>
+              <a:endParaRPr lang="en-CA"/>
+            </a:p>
+          </p:txBody>
+        </p:sp>
         <p:pic>
           <p:nvPicPr>
-            <p:cNvPr id="16" name="Picture 15" descr="A map of the world&#10;&#10;Description automatically generated">
+            <p:cNvPr id="5" name="Picture 4" descr="A map of the world&#10;&#10;Description automatically generated">
               <a:extLst>
                 <a:ext uri="{FF2B5EF4-FFF2-40B4-BE49-F238E27FC236}">
-                  <a16:creationId xmlns:a16="http://schemas.microsoft.com/office/drawing/2014/main" id="{668F8655-F470-F838-BD89-D1FD535CD196}"/>
+                  <a16:creationId xmlns:a16="http://schemas.microsoft.com/office/drawing/2014/main" id="{3EE02C4E-68F8-97D3-C310-53983C558720}"/>
                 </a:ext>
               </a:extLst>
             </p:cNvPr>
@@ -6094,68 +6306,28 @@
           </p:nvPicPr>
           <p:blipFill>
             <a:blip r:embed="rId3"/>
-            <a:srcRect l="23772" t="2932" r="22496" b="8496"/>
+            <a:srcRect l="27064" t="18187" r="26084" b="8627"/>
             <a:stretch/>
           </p:blipFill>
           <p:spPr>
             <a:xfrm>
-              <a:off x="-7324053" y="6303815"/>
-              <a:ext cx="8271402" cy="8604867"/>
+              <a:off x="-6813646" y="7955017"/>
+              <a:ext cx="7063859" cy="6963786"/>
             </a:xfrm>
             <a:prstGeom prst="rect">
               <a:avLst/>
             </a:prstGeom>
             <a:ln>
-              <a:solidFill>
-                <a:schemeClr val="tx1"/>
-              </a:solidFill>
+              <a:noFill/>
             </a:ln>
           </p:spPr>
         </p:pic>
-        <p:sp>
-          <p:nvSpPr>
-            <p:cNvPr id="26" name="TextBox 25">
+        <p:pic>
+          <p:nvPicPr>
+            <p:cNvPr id="4" name="Picture 3" descr="A map of the world&#10;&#10;Description automatically generated">
               <a:extLst>
                 <a:ext uri="{FF2B5EF4-FFF2-40B4-BE49-F238E27FC236}">
-                  <a16:creationId xmlns:a16="http://schemas.microsoft.com/office/drawing/2014/main" id="{9045F7D6-B33B-1AE4-3566-6655996D014B}"/>
-                </a:ext>
-              </a:extLst>
-            </p:cNvPr>
-            <p:cNvSpPr txBox="1"/>
-            <p:nvPr/>
-          </p:nvSpPr>
-          <p:spPr>
-            <a:xfrm flipH="1">
-              <a:off x="-7279205" y="6388139"/>
-              <a:ext cx="8099085" cy="830997"/>
-            </a:xfrm>
-            <a:prstGeom prst="rect">
-              <a:avLst/>
-            </a:prstGeom>
-            <a:solidFill>
-              <a:schemeClr val="bg1"/>
-            </a:solidFill>
-          </p:spPr>
-          <p:txBody>
-            <a:bodyPr wrap="square" rtlCol="0">
-              <a:noAutofit/>
-            </a:bodyPr>
-            <a:lstStyle/>
-            <a:p>
-              <a:pPr algn="ctr"/>
-              <a:endParaRPr lang="en-CA" sz="2400" dirty="0">
-                <a:latin typeface="Roboto Condensed" pitchFamily="2" charset="0"/>
-                <a:ea typeface="Roboto Condensed" pitchFamily="2" charset="0"/>
-              </a:endParaRPr>
-            </a:p>
-          </p:txBody>
-        </p:sp>
-        <p:pic>
-          <p:nvPicPr>
-            <p:cNvPr id="25" name="Picture 24" descr="A map of the world&#10;&#10;Description automatically generated">
-              <a:extLst>
-                <a:ext uri="{FF2B5EF4-FFF2-40B4-BE49-F238E27FC236}">
-                  <a16:creationId xmlns:a16="http://schemas.microsoft.com/office/drawing/2014/main" id="{88443989-E165-AB62-478B-199401380378}"/>
+                  <a16:creationId xmlns:a16="http://schemas.microsoft.com/office/drawing/2014/main" id="{018C4A21-4A94-6602-A7BB-4D3EDD93068E}"/>
                 </a:ext>
               </a:extLst>
             </p:cNvPr>
@@ -6166,13 +6338,13 @@
           </p:nvPicPr>
           <p:blipFill>
             <a:blip r:embed="rId3"/>
-            <a:srcRect l="40254" t="3478" r="27444" b="86010"/>
+            <a:srcRect l="40524" t="4706" r="26084" b="86823"/>
             <a:stretch/>
           </p:blipFill>
           <p:spPr>
             <a:xfrm>
-              <a:off x="-5833538" y="6711304"/>
-              <a:ext cx="4972425" cy="1021341"/>
+              <a:off x="-6492661" y="6954908"/>
+              <a:ext cx="6518548" cy="1043635"/>
             </a:xfrm>
             <a:prstGeom prst="rect">
               <a:avLst/>
@@ -6196,203 +6368,7 @@
           </p:nvSpPr>
           <p:spPr>
             <a:xfrm flipH="1">
-              <a:off x="-5833539" y="6467633"/>
-              <a:ext cx="4815230" cy="461665"/>
-            </a:xfrm>
-            <a:prstGeom prst="rect">
-              <a:avLst/>
-            </a:prstGeom>
-            <a:solidFill>
-              <a:schemeClr val="bg1"/>
-            </a:solidFill>
-          </p:spPr>
-          <p:txBody>
-            <a:bodyPr wrap="square" rtlCol="0">
-              <a:spAutoFit/>
-            </a:bodyPr>
-            <a:lstStyle/>
-            <a:p>
-              <a:pPr algn="ctr"/>
-              <a:r>
-                <a:rPr lang="en-CA" sz="2400" dirty="0">
-                  <a:latin typeface="Roboto Condensed" pitchFamily="2" charset="0"/>
-                  <a:ea typeface="Roboto Condensed" pitchFamily="2" charset="0"/>
-                </a:rPr>
-                <a:t>Climate frequency </a:t>
-              </a:r>
-              <a:r>
-                <a:rPr lang="en-CA" dirty="0">
-                  <a:latin typeface="Roboto Condensed" pitchFamily="2" charset="0"/>
-                  <a:ea typeface="Roboto Condensed" pitchFamily="2" charset="0"/>
-                </a:rPr>
-                <a:t>(cells/bin)</a:t>
-              </a:r>
-              <a:endParaRPr lang="en-CA" sz="2400" dirty="0">
-                <a:latin typeface="Roboto Condensed" pitchFamily="2" charset="0"/>
-                <a:ea typeface="Roboto Condensed" pitchFamily="2" charset="0"/>
-              </a:endParaRPr>
-            </a:p>
-          </p:txBody>
-        </p:sp>
-        <p:pic>
-          <p:nvPicPr>
-            <p:cNvPr id="7" name="Picture 6" descr="A graph showing the temperature of a climate&#10;&#10;Description automatically generated with medium confidence">
-              <a:extLst>
-                <a:ext uri="{FF2B5EF4-FFF2-40B4-BE49-F238E27FC236}">
-                  <a16:creationId xmlns:a16="http://schemas.microsoft.com/office/drawing/2014/main" id="{CEE892B9-C768-7745-2B86-24B2A74DEF8E}"/>
-                </a:ext>
-              </a:extLst>
-            </p:cNvPr>
-            <p:cNvPicPr>
-              <a:picLocks noChangeAspect="1"/>
-            </p:cNvPicPr>
-            <p:nvPr/>
-          </p:nvPicPr>
-          <p:blipFill>
-            <a:blip r:embed="rId4"/>
-            <a:stretch>
-              <a:fillRect/>
-            </a:stretch>
-          </p:blipFill>
-          <p:spPr>
-            <a:xfrm>
-              <a:off x="-7324052" y="-1659966"/>
-              <a:ext cx="8271401" cy="7770104"/>
-            </a:xfrm>
-            <a:prstGeom prst="rect">
-              <a:avLst/>
-            </a:prstGeom>
-            <a:ln>
-              <a:solidFill>
-                <a:schemeClr val="tx1"/>
-              </a:solidFill>
-            </a:ln>
-          </p:spPr>
-        </p:pic>
-        <p:sp>
-          <p:nvSpPr>
-            <p:cNvPr id="13" name="TextBox 12">
-              <a:extLst>
-                <a:ext uri="{FF2B5EF4-FFF2-40B4-BE49-F238E27FC236}">
-                  <a16:creationId xmlns:a16="http://schemas.microsoft.com/office/drawing/2014/main" id="{52F82869-4FA7-AF01-2D69-6B3BDBA6065C}"/>
-                </a:ext>
-              </a:extLst>
-            </p:cNvPr>
-            <p:cNvSpPr txBox="1"/>
-            <p:nvPr/>
-          </p:nvSpPr>
-          <p:spPr>
-            <a:xfrm>
-              <a:off x="-7282745" y="-2465863"/>
-              <a:ext cx="8230094" cy="646331"/>
-            </a:xfrm>
-            <a:prstGeom prst="rect">
-              <a:avLst/>
-            </a:prstGeom>
-            <a:noFill/>
-          </p:spPr>
-          <p:txBody>
-            <a:bodyPr wrap="square" rtlCol="0">
-              <a:spAutoFit/>
-            </a:bodyPr>
-            <a:lstStyle/>
-            <a:p>
-              <a:pPr algn="ctr"/>
-              <a:r>
-                <a:rPr lang="en-CA" sz="3600" b="1" dirty="0">
-                  <a:latin typeface="Roboto Condensed" pitchFamily="2" charset="0"/>
-                  <a:ea typeface="Roboto Condensed" pitchFamily="2" charset="0"/>
-                </a:rPr>
-                <a:t>Available climate space</a:t>
-              </a:r>
-            </a:p>
-          </p:txBody>
-        </p:sp>
-        <p:sp>
-          <p:nvSpPr>
-            <p:cNvPr id="28" name="TextBox 27">
-              <a:extLst>
-                <a:ext uri="{FF2B5EF4-FFF2-40B4-BE49-F238E27FC236}">
-                  <a16:creationId xmlns:a16="http://schemas.microsoft.com/office/drawing/2014/main" id="{F1F7001F-685C-B27E-F081-19BA5DDA53F1}"/>
-                </a:ext>
-              </a:extLst>
-            </p:cNvPr>
-            <p:cNvSpPr txBox="1"/>
-            <p:nvPr/>
-          </p:nvSpPr>
-          <p:spPr>
-            <a:xfrm flipH="1">
-              <a:off x="-7237896" y="-1585163"/>
-              <a:ext cx="8099085" cy="960897"/>
-            </a:xfrm>
-            <a:prstGeom prst="rect">
-              <a:avLst/>
-            </a:prstGeom>
-            <a:solidFill>
-              <a:schemeClr val="bg1"/>
-            </a:solidFill>
-          </p:spPr>
-          <p:txBody>
-            <a:bodyPr wrap="square" rtlCol="0">
-              <a:noAutofit/>
-            </a:bodyPr>
-            <a:lstStyle/>
-            <a:p>
-              <a:pPr algn="ctr"/>
-              <a:endParaRPr lang="en-CA" sz="2400" dirty="0">
-                <a:latin typeface="Roboto Condensed" pitchFamily="2" charset="0"/>
-                <a:ea typeface="Roboto Condensed" pitchFamily="2" charset="0"/>
-              </a:endParaRPr>
-            </a:p>
-          </p:txBody>
-        </p:sp>
-        <p:pic>
-          <p:nvPicPr>
-            <p:cNvPr id="27" name="Picture 26" descr="A graph showing the temperature of a climate&#10;&#10;Description automatically generated with medium confidence">
-              <a:extLst>
-                <a:ext uri="{FF2B5EF4-FFF2-40B4-BE49-F238E27FC236}">
-                  <a16:creationId xmlns:a16="http://schemas.microsoft.com/office/drawing/2014/main" id="{454E98ED-DD0F-19EE-73BB-B803F57C6AE5}"/>
-                </a:ext>
-              </a:extLst>
-            </p:cNvPr>
-            <p:cNvPicPr>
-              <a:picLocks noChangeAspect="1"/>
-            </p:cNvPicPr>
-            <p:nvPr/>
-          </p:nvPicPr>
-          <p:blipFill>
-            <a:blip r:embed="rId4"/>
-            <a:srcRect l="31178" t="5103" r="7517" b="86579"/>
-            <a:stretch/>
-          </p:blipFill>
-          <p:spPr>
-            <a:xfrm>
-              <a:off x="-5765045" y="-1013843"/>
-              <a:ext cx="5070764" cy="646331"/>
-            </a:xfrm>
-            <a:prstGeom prst="rect">
-              <a:avLst/>
-            </a:prstGeom>
-            <a:ln>
-              <a:noFill/>
-            </a:ln>
-          </p:spPr>
-        </p:pic>
-        <p:sp>
-          <p:nvSpPr>
-            <p:cNvPr id="29" name="TextBox 28">
-              <a:extLst>
-                <a:ext uri="{FF2B5EF4-FFF2-40B4-BE49-F238E27FC236}">
-                  <a16:creationId xmlns:a16="http://schemas.microsoft.com/office/drawing/2014/main" id="{CE6D1D1A-3F3C-8352-E860-DF4473210DCF}"/>
-                </a:ext>
-              </a:extLst>
-            </p:cNvPr>
-            <p:cNvSpPr txBox="1"/>
-            <p:nvPr/>
-          </p:nvSpPr>
-          <p:spPr>
-            <a:xfrm flipH="1">
-              <a:off x="-5637278" y="-1475508"/>
+              <a:off x="-5689332" y="6643920"/>
               <a:ext cx="4815230" cy="461665"/>
             </a:xfrm>
             <a:prstGeom prst="rect">
@@ -6432,10 +6408,10 @@
         </p:sp>
         <p:sp>
           <p:nvSpPr>
-            <p:cNvPr id="20" name="TextBox 19">
+            <p:cNvPr id="13" name="TextBox 12">
               <a:extLst>
                 <a:ext uri="{FF2B5EF4-FFF2-40B4-BE49-F238E27FC236}">
-                  <a16:creationId xmlns:a16="http://schemas.microsoft.com/office/drawing/2014/main" id="{D3D4EE85-63A5-FD0D-9847-6AA023DD5384}"/>
+                  <a16:creationId xmlns:a16="http://schemas.microsoft.com/office/drawing/2014/main" id="{52F82869-4FA7-AF01-2D69-6B3BDBA6065C}"/>
                 </a:ext>
               </a:extLst>
             </p:cNvPr>
@@ -6444,8 +6420,47 @@
           </p:nvSpPr>
           <p:spPr>
             <a:xfrm>
-              <a:off x="-7198642" y="-1593762"/>
-              <a:ext cx="405880" cy="646331"/>
+              <a:off x="-7391797" y="-2889178"/>
+              <a:ext cx="8230094" cy="646331"/>
+            </a:xfrm>
+            <a:prstGeom prst="rect">
+              <a:avLst/>
+            </a:prstGeom>
+            <a:noFill/>
+          </p:spPr>
+          <p:txBody>
+            <a:bodyPr wrap="square" rtlCol="0">
+              <a:spAutoFit/>
+            </a:bodyPr>
+            <a:lstStyle/>
+            <a:p>
+              <a:pPr algn="ctr"/>
+              <a:r>
+                <a:rPr lang="en-CA" sz="3600" b="1" dirty="0">
+                  <a:latin typeface="Roboto Condensed" pitchFamily="2" charset="0"/>
+                  <a:ea typeface="Roboto Condensed" pitchFamily="2" charset="0"/>
+                </a:rPr>
+                <a:t>Available climate space</a:t>
+              </a:r>
+            </a:p>
+          </p:txBody>
+        </p:sp>
+        <p:sp>
+          <p:nvSpPr>
+            <p:cNvPr id="32" name="TextBox 31">
+              <a:extLst>
+                <a:ext uri="{FF2B5EF4-FFF2-40B4-BE49-F238E27FC236}">
+                  <a16:creationId xmlns:a16="http://schemas.microsoft.com/office/drawing/2014/main" id="{0D4A97C1-2889-BFD6-F928-5C0F63A24E5E}"/>
+                </a:ext>
+              </a:extLst>
+            </p:cNvPr>
+            <p:cNvSpPr txBox="1"/>
+            <p:nvPr/>
+          </p:nvSpPr>
+          <p:spPr>
+            <a:xfrm>
+              <a:off x="-7084412" y="6782420"/>
+              <a:ext cx="397866" cy="646331"/>
             </a:xfrm>
             <a:prstGeom prst="rect">
               <a:avLst/>
@@ -6463,154 +6478,11 @@
                   <a:latin typeface="Roboto Condensed" pitchFamily="2" charset="0"/>
                   <a:ea typeface="Roboto Condensed" pitchFamily="2" charset="0"/>
                 </a:rPr>
-                <a:t>a</a:t>
+                <a:t>c</a:t>
               </a:r>
             </a:p>
           </p:txBody>
         </p:sp>
-        <p:pic>
-          <p:nvPicPr>
-            <p:cNvPr id="2" name="Picture 1" descr="A graph of a graph showing the temperature of a climate&#10;&#10;Description automatically generated with medium confidence">
-              <a:extLst>
-                <a:ext uri="{FF2B5EF4-FFF2-40B4-BE49-F238E27FC236}">
-                  <a16:creationId xmlns:a16="http://schemas.microsoft.com/office/drawing/2014/main" id="{428E4792-20CB-089B-76DD-474735E2F5D1}"/>
-                </a:ext>
-              </a:extLst>
-            </p:cNvPr>
-            <p:cNvPicPr>
-              <a:picLocks noChangeAspect="1"/>
-            </p:cNvPicPr>
-            <p:nvPr/>
-          </p:nvPicPr>
-          <p:blipFill>
-            <a:blip r:embed="rId5"/>
-            <a:stretch>
-              <a:fillRect/>
-            </a:stretch>
-          </p:blipFill>
-          <p:spPr>
-            <a:xfrm>
-              <a:off x="1246083" y="-1659966"/>
-              <a:ext cx="8271402" cy="7770104"/>
-            </a:xfrm>
-            <a:prstGeom prst="rect">
-              <a:avLst/>
-            </a:prstGeom>
-            <a:ln>
-              <a:solidFill>
-                <a:schemeClr val="tx1"/>
-              </a:solidFill>
-            </a:ln>
-          </p:spPr>
-        </p:pic>
-        <p:sp>
-          <p:nvSpPr>
-            <p:cNvPr id="31" name="TextBox 30">
-              <a:extLst>
-                <a:ext uri="{FF2B5EF4-FFF2-40B4-BE49-F238E27FC236}">
-                  <a16:creationId xmlns:a16="http://schemas.microsoft.com/office/drawing/2014/main" id="{779818FB-A174-6DA7-C901-FFCB8301FAB3}"/>
-                </a:ext>
-              </a:extLst>
-            </p:cNvPr>
-            <p:cNvSpPr txBox="1"/>
-            <p:nvPr/>
-          </p:nvSpPr>
-          <p:spPr>
-            <a:xfrm flipH="1">
-              <a:off x="1366873" y="-1558477"/>
-              <a:ext cx="8099085" cy="960897"/>
-            </a:xfrm>
-            <a:prstGeom prst="rect">
-              <a:avLst/>
-            </a:prstGeom>
-            <a:solidFill>
-              <a:schemeClr val="bg1"/>
-            </a:solidFill>
-          </p:spPr>
-          <p:txBody>
-            <a:bodyPr wrap="square" rtlCol="0">
-              <a:noAutofit/>
-            </a:bodyPr>
-            <a:lstStyle/>
-            <a:p>
-              <a:pPr algn="ctr"/>
-              <a:endParaRPr lang="en-CA" sz="2400" dirty="0">
-                <a:latin typeface="Roboto Condensed" pitchFamily="2" charset="0"/>
-                <a:ea typeface="Roboto Condensed" pitchFamily="2" charset="0"/>
-              </a:endParaRPr>
-            </a:p>
-          </p:txBody>
-        </p:sp>
-        <p:sp>
-          <p:nvSpPr>
-            <p:cNvPr id="21" name="TextBox 20">
-              <a:extLst>
-                <a:ext uri="{FF2B5EF4-FFF2-40B4-BE49-F238E27FC236}">
-                  <a16:creationId xmlns:a16="http://schemas.microsoft.com/office/drawing/2014/main" id="{CB8A1034-7C7A-95FA-56DA-B02AE369C485}"/>
-                </a:ext>
-              </a:extLst>
-            </p:cNvPr>
-            <p:cNvSpPr txBox="1"/>
-            <p:nvPr/>
-          </p:nvSpPr>
-          <p:spPr>
-            <a:xfrm>
-              <a:off x="1366875" y="-1593762"/>
-              <a:ext cx="412292" cy="646331"/>
-            </a:xfrm>
-            <a:prstGeom prst="rect">
-              <a:avLst/>
-            </a:prstGeom>
-            <a:noFill/>
-          </p:spPr>
-          <p:txBody>
-            <a:bodyPr wrap="none" rtlCol="0">
-              <a:spAutoFit/>
-            </a:bodyPr>
-            <a:lstStyle/>
-            <a:p>
-              <a:r>
-                <a:rPr lang="en-CA" sz="3600" dirty="0">
-                  <a:latin typeface="Roboto Condensed" pitchFamily="2" charset="0"/>
-                  <a:ea typeface="Roboto Condensed" pitchFamily="2" charset="0"/>
-                </a:rPr>
-                <a:t>b</a:t>
-              </a:r>
-            </a:p>
-          </p:txBody>
-        </p:sp>
-        <p:pic>
-          <p:nvPicPr>
-            <p:cNvPr id="30" name="Picture 29" descr="A graph of a graph showing the temperature of a climate&#10;&#10;Description automatically generated with medium confidence">
-              <a:extLst>
-                <a:ext uri="{FF2B5EF4-FFF2-40B4-BE49-F238E27FC236}">
-                  <a16:creationId xmlns:a16="http://schemas.microsoft.com/office/drawing/2014/main" id="{F9E9695B-5058-031A-37A4-C404AFDFCD9E}"/>
-                </a:ext>
-              </a:extLst>
-            </p:cNvPr>
-            <p:cNvPicPr>
-              <a:picLocks noChangeAspect="1"/>
-            </p:cNvPicPr>
-            <p:nvPr/>
-          </p:nvPicPr>
-          <p:blipFill>
-            <a:blip r:embed="rId5"/>
-            <a:srcRect l="31165" t="4875" r="7698" b="87168"/>
-            <a:stretch/>
-          </p:blipFill>
-          <p:spPr>
-            <a:xfrm>
-              <a:off x="2704036" y="-1055337"/>
-              <a:ext cx="5056909" cy="618252"/>
-            </a:xfrm>
-            <a:prstGeom prst="rect">
-              <a:avLst/>
-            </a:prstGeom>
-            <a:ln>
-              <a:noFill/>
-            </a:ln>
-          </p:spPr>
-        </p:pic>
         <p:sp>
           <p:nvSpPr>
             <p:cNvPr id="10" name="TextBox 9">
@@ -6625,8 +6497,8 @@
           </p:nvSpPr>
           <p:spPr>
             <a:xfrm flipH="1">
-              <a:off x="2619899" y="-1436208"/>
-              <a:ext cx="5523769" cy="461665"/>
+              <a:off x="2524396" y="-2087352"/>
+              <a:ext cx="6202136" cy="461665"/>
             </a:xfrm>
             <a:prstGeom prst="rect">
               <a:avLst/>
@@ -6680,7 +6552,7 @@
           </p:nvSpPr>
           <p:spPr>
             <a:xfrm>
-              <a:off x="1178143" y="-2458224"/>
+              <a:off x="971397" y="-2888277"/>
               <a:ext cx="8271401" cy="646331"/>
             </a:xfrm>
             <a:prstGeom prst="rect">
@@ -6705,78 +6577,6 @@
             </a:p>
           </p:txBody>
         </p:sp>
-        <p:pic>
-          <p:nvPicPr>
-            <p:cNvPr id="6" name="Picture 5" descr="A map of the world&#10;&#10;Description automatically generated">
-              <a:extLst>
-                <a:ext uri="{FF2B5EF4-FFF2-40B4-BE49-F238E27FC236}">
-                  <a16:creationId xmlns:a16="http://schemas.microsoft.com/office/drawing/2014/main" id="{9E272CB4-94F6-7191-0F93-BA83A534E03E}"/>
-                </a:ext>
-              </a:extLst>
-            </p:cNvPr>
-            <p:cNvPicPr>
-              <a:picLocks noChangeAspect="1"/>
-            </p:cNvPicPr>
-            <p:nvPr/>
-          </p:nvPicPr>
-          <p:blipFill>
-            <a:blip r:embed="rId6"/>
-            <a:srcRect l="25194" t="3802" r="21896" b="8981"/>
-            <a:stretch/>
-          </p:blipFill>
-          <p:spPr>
-            <a:xfrm>
-              <a:off x="1246083" y="6303815"/>
-              <a:ext cx="8271402" cy="8604867"/>
-            </a:xfrm>
-            <a:prstGeom prst="rect">
-              <a:avLst/>
-            </a:prstGeom>
-            <a:ln>
-              <a:solidFill>
-                <a:schemeClr val="tx1"/>
-              </a:solidFill>
-            </a:ln>
-          </p:spPr>
-        </p:pic>
-        <p:sp>
-          <p:nvSpPr>
-            <p:cNvPr id="19" name="TextBox 18">
-              <a:extLst>
-                <a:ext uri="{FF2B5EF4-FFF2-40B4-BE49-F238E27FC236}">
-                  <a16:creationId xmlns:a16="http://schemas.microsoft.com/office/drawing/2014/main" id="{DFDDE780-EBB3-4153-BE93-E08E81DD4ECB}"/>
-                </a:ext>
-              </a:extLst>
-            </p:cNvPr>
-            <p:cNvSpPr txBox="1"/>
-            <p:nvPr/>
-          </p:nvSpPr>
-          <p:spPr>
-            <a:xfrm flipH="1">
-              <a:off x="1366874" y="6361615"/>
-              <a:ext cx="8099085" cy="830997"/>
-            </a:xfrm>
-            <a:prstGeom prst="rect">
-              <a:avLst/>
-            </a:prstGeom>
-            <a:solidFill>
-              <a:schemeClr val="bg1"/>
-            </a:solidFill>
-          </p:spPr>
-          <p:txBody>
-            <a:bodyPr wrap="square" rtlCol="0">
-              <a:noAutofit/>
-            </a:bodyPr>
-            <a:lstStyle/>
-            <a:p>
-              <a:pPr algn="ctr"/>
-              <a:endParaRPr lang="en-CA" sz="2400" dirty="0">
-                <a:latin typeface="Roboto Condensed" pitchFamily="2" charset="0"/>
-                <a:ea typeface="Roboto Condensed" pitchFamily="2" charset="0"/>
-              </a:endParaRPr>
-            </a:p>
-          </p:txBody>
-        </p:sp>
         <p:sp>
           <p:nvSpPr>
             <p:cNvPr id="22" name="TextBox 21">
@@ -6791,7 +6591,7 @@
           </p:nvSpPr>
           <p:spPr>
             <a:xfrm>
-              <a:off x="1366875" y="6388139"/>
+              <a:off x="1434548" y="6729203"/>
               <a:ext cx="412292" cy="646331"/>
             </a:xfrm>
             <a:prstGeom prst="rect">
@@ -6817,10 +6617,135 @@
         </p:sp>
         <p:pic>
           <p:nvPicPr>
-            <p:cNvPr id="24" name="Picture 23" descr="A map of the world&#10;&#10;Description automatically generated">
+            <p:cNvPr id="11" name="Picture 10" descr="A map of the world&#10;&#10;Description automatically generated">
               <a:extLst>
                 <a:ext uri="{FF2B5EF4-FFF2-40B4-BE49-F238E27FC236}">
-                  <a16:creationId xmlns:a16="http://schemas.microsoft.com/office/drawing/2014/main" id="{02BBE92A-CC80-EB46-2D1F-5639E9059A64}"/>
+                  <a16:creationId xmlns:a16="http://schemas.microsoft.com/office/drawing/2014/main" id="{BA533256-9DB0-EC05-987A-D6074707ED91}"/>
+                </a:ext>
+              </a:extLst>
+            </p:cNvPr>
+            <p:cNvPicPr>
+              <a:picLocks noChangeAspect="1"/>
+            </p:cNvPicPr>
+            <p:nvPr/>
+          </p:nvPicPr>
+          <p:blipFill>
+            <a:blip r:embed="rId4"/>
+            <a:srcRect l="26198" t="15810" r="26252" b="8318"/>
+            <a:stretch/>
+          </p:blipFill>
+          <p:spPr>
+            <a:xfrm>
+              <a:off x="1738447" y="7769193"/>
+              <a:ext cx="6988085" cy="7036938"/>
+            </a:xfrm>
+            <a:prstGeom prst="rect">
+              <a:avLst/>
+            </a:prstGeom>
+          </p:spPr>
+        </p:pic>
+        <p:pic>
+          <p:nvPicPr>
+            <p:cNvPr id="12" name="Picture 11" descr="A map of the world&#10;&#10;Description automatically generated">
+              <a:extLst>
+                <a:ext uri="{FF2B5EF4-FFF2-40B4-BE49-F238E27FC236}">
+                  <a16:creationId xmlns:a16="http://schemas.microsoft.com/office/drawing/2014/main" id="{CE47AF87-52D6-686D-C25D-8BD161235A5D}"/>
+                </a:ext>
+              </a:extLst>
+            </p:cNvPr>
+            <p:cNvPicPr>
+              <a:picLocks noChangeAspect="1"/>
+            </p:cNvPicPr>
+            <p:nvPr/>
+          </p:nvPicPr>
+          <p:blipFill>
+            <a:blip r:embed="rId4"/>
+            <a:srcRect l="42182" t="4248" r="25287" b="86227"/>
+            <a:stretch/>
+          </p:blipFill>
+          <p:spPr>
+            <a:xfrm>
+              <a:off x="2249126" y="6907387"/>
+              <a:ext cx="6162262" cy="1138679"/>
+            </a:xfrm>
+            <a:prstGeom prst="rect">
+              <a:avLst/>
+            </a:prstGeom>
+          </p:spPr>
+        </p:pic>
+        <p:pic>
+          <p:nvPicPr>
+            <p:cNvPr id="38" name="Picture 37" descr="A graph of a temperature&#10;&#10;Description automatically generated with medium confidence">
+              <a:extLst>
+                <a:ext uri="{FF2B5EF4-FFF2-40B4-BE49-F238E27FC236}">
+                  <a16:creationId xmlns:a16="http://schemas.microsoft.com/office/drawing/2014/main" id="{190C8A09-583C-C862-4C5B-290A5133A48D}"/>
+                </a:ext>
+              </a:extLst>
+            </p:cNvPr>
+            <p:cNvPicPr>
+              <a:picLocks noChangeAspect="1"/>
+            </p:cNvPicPr>
+            <p:nvPr/>
+          </p:nvPicPr>
+          <p:blipFill>
+            <a:blip r:embed="rId5"/>
+            <a:srcRect l="1948" t="3912" r="765" b="2126"/>
+            <a:stretch/>
+          </p:blipFill>
+          <p:spPr>
+            <a:xfrm>
+              <a:off x="1366874" y="-1651652"/>
+              <a:ext cx="7480449" cy="7853595"/>
+            </a:xfrm>
+            <a:prstGeom prst="rect">
+              <a:avLst/>
+            </a:prstGeom>
+          </p:spPr>
+        </p:pic>
+        <p:sp>
+          <p:nvSpPr>
+            <p:cNvPr id="21" name="TextBox 20">
+              <a:extLst>
+                <a:ext uri="{FF2B5EF4-FFF2-40B4-BE49-F238E27FC236}">
+                  <a16:creationId xmlns:a16="http://schemas.microsoft.com/office/drawing/2014/main" id="{CB8A1034-7C7A-95FA-56DA-B02AE369C485}"/>
+                </a:ext>
+              </a:extLst>
+            </p:cNvPr>
+            <p:cNvSpPr txBox="1"/>
+            <p:nvPr/>
+          </p:nvSpPr>
+          <p:spPr>
+            <a:xfrm>
+              <a:off x="1631674" y="-1546878"/>
+              <a:ext cx="412292" cy="646331"/>
+            </a:xfrm>
+            <a:prstGeom prst="rect">
+              <a:avLst/>
+            </a:prstGeom>
+            <a:noFill/>
+          </p:spPr>
+          <p:txBody>
+            <a:bodyPr wrap="none" rtlCol="0">
+              <a:spAutoFit/>
+            </a:bodyPr>
+            <a:lstStyle/>
+            <a:p>
+              <a:r>
+                <a:rPr lang="en-CA" sz="3600" dirty="0">
+                  <a:latin typeface="Roboto Condensed" pitchFamily="2" charset="0"/>
+                  <a:ea typeface="Roboto Condensed" pitchFamily="2" charset="0"/>
+                </a:rPr>
+                <a:t>b</a:t>
+              </a:r>
+            </a:p>
+          </p:txBody>
+        </p:sp>
+        <p:pic>
+          <p:nvPicPr>
+            <p:cNvPr id="46" name="Picture 45" descr="A graph showing the temperature of a person&#10;&#10;Description automatically generated with medium confidence">
+              <a:extLst>
+                <a:ext uri="{FF2B5EF4-FFF2-40B4-BE49-F238E27FC236}">
+                  <a16:creationId xmlns:a16="http://schemas.microsoft.com/office/drawing/2014/main" id="{A0FBB99C-92D6-BACD-54E5-DEBE6424D103}"/>
                 </a:ext>
               </a:extLst>
             </p:cNvPr>
@@ -6831,22 +6756,109 @@
           </p:nvPicPr>
           <p:blipFill>
             <a:blip r:embed="rId6"/>
-            <a:srcRect l="42096" t="3802" r="21895" b="86163"/>
+            <a:srcRect b="2760"/>
             <a:stretch/>
           </p:blipFill>
           <p:spPr>
             <a:xfrm>
-              <a:off x="2807961" y="6779216"/>
-              <a:ext cx="5629204" cy="989977"/>
+              <a:off x="-7223255" y="-2021195"/>
+              <a:ext cx="7736038" cy="8177202"/>
             </a:xfrm>
             <a:prstGeom prst="rect">
               <a:avLst/>
             </a:prstGeom>
-            <a:ln>
-              <a:noFill/>
-            </a:ln>
           </p:spPr>
         </p:pic>
+        <p:sp>
+          <p:nvSpPr>
+            <p:cNvPr id="29" name="TextBox 28">
+              <a:extLst>
+                <a:ext uri="{FF2B5EF4-FFF2-40B4-BE49-F238E27FC236}">
+                  <a16:creationId xmlns:a16="http://schemas.microsoft.com/office/drawing/2014/main" id="{CE6D1D1A-3F3C-8352-E860-DF4473210DCF}"/>
+                </a:ext>
+              </a:extLst>
+            </p:cNvPr>
+            <p:cNvSpPr txBox="1"/>
+            <p:nvPr/>
+          </p:nvSpPr>
+          <p:spPr>
+            <a:xfrm flipH="1">
+              <a:off x="-5211642" y="-2087353"/>
+              <a:ext cx="4815230" cy="461665"/>
+            </a:xfrm>
+            <a:prstGeom prst="rect">
+              <a:avLst/>
+            </a:prstGeom>
+            <a:solidFill>
+              <a:schemeClr val="bg1"/>
+            </a:solidFill>
+          </p:spPr>
+          <p:txBody>
+            <a:bodyPr wrap="square" rtlCol="0">
+              <a:spAutoFit/>
+            </a:bodyPr>
+            <a:lstStyle/>
+            <a:p>
+              <a:pPr algn="ctr"/>
+              <a:r>
+                <a:rPr lang="en-CA" sz="2400" dirty="0">
+                  <a:latin typeface="Roboto Condensed" pitchFamily="2" charset="0"/>
+                  <a:ea typeface="Roboto Condensed" pitchFamily="2" charset="0"/>
+                </a:rPr>
+                <a:t>Climate frequency </a:t>
+              </a:r>
+              <a:r>
+                <a:rPr lang="en-CA" dirty="0">
+                  <a:latin typeface="Roboto Condensed" pitchFamily="2" charset="0"/>
+                  <a:ea typeface="Roboto Condensed" pitchFamily="2" charset="0"/>
+                </a:rPr>
+                <a:t>(cells/bin)</a:t>
+              </a:r>
+              <a:endParaRPr lang="en-CA" sz="2400" dirty="0">
+                <a:latin typeface="Roboto Condensed" pitchFamily="2" charset="0"/>
+                <a:ea typeface="Roboto Condensed" pitchFamily="2" charset="0"/>
+              </a:endParaRPr>
+            </a:p>
+          </p:txBody>
+        </p:sp>
+        <p:sp>
+          <p:nvSpPr>
+            <p:cNvPr id="20" name="TextBox 19">
+              <a:extLst>
+                <a:ext uri="{FF2B5EF4-FFF2-40B4-BE49-F238E27FC236}">
+                  <a16:creationId xmlns:a16="http://schemas.microsoft.com/office/drawing/2014/main" id="{D3D4EE85-63A5-FD0D-9847-6AA023DD5384}"/>
+                </a:ext>
+              </a:extLst>
+            </p:cNvPr>
+            <p:cNvSpPr txBox="1"/>
+            <p:nvPr/>
+          </p:nvSpPr>
+          <p:spPr>
+            <a:xfrm>
+              <a:off x="-7061266" y="-1856521"/>
+              <a:ext cx="405880" cy="646331"/>
+            </a:xfrm>
+            <a:prstGeom prst="rect">
+              <a:avLst/>
+            </a:prstGeom>
+            <a:noFill/>
+          </p:spPr>
+          <p:txBody>
+            <a:bodyPr wrap="none" rtlCol="0">
+              <a:spAutoFit/>
+            </a:bodyPr>
+            <a:lstStyle/>
+            <a:p>
+              <a:r>
+                <a:rPr lang="en-CA" sz="3600" dirty="0">
+                  <a:latin typeface="Roboto Condensed" pitchFamily="2" charset="0"/>
+                  <a:ea typeface="Roboto Condensed" pitchFamily="2" charset="0"/>
+                </a:rPr>
+                <a:t>a</a:t>
+              </a:r>
+            </a:p>
+          </p:txBody>
+        </p:sp>
         <p:sp>
           <p:nvSpPr>
             <p:cNvPr id="23" name="TextBox 22">
@@ -6861,7 +6873,7 @@
           </p:nvSpPr>
           <p:spPr>
             <a:xfrm flipH="1">
-              <a:off x="2807960" y="6477971"/>
+              <a:off x="2911532" y="6676554"/>
               <a:ext cx="5011768" cy="461665"/>
             </a:xfrm>
             <a:prstGeom prst="rect">
@@ -6903,208 +6915,6 @@
                   <a:ea typeface="Roboto Condensed" pitchFamily="2" charset="0"/>
                 </a:rPr>
                 <a:t>/bin)</a:t>
-              </a:r>
-            </a:p>
-          </p:txBody>
-        </p:sp>
-        <p:sp>
-          <p:nvSpPr>
-            <p:cNvPr id="32" name="TextBox 31">
-              <a:extLst>
-                <a:ext uri="{FF2B5EF4-FFF2-40B4-BE49-F238E27FC236}">
-                  <a16:creationId xmlns:a16="http://schemas.microsoft.com/office/drawing/2014/main" id="{0D4A97C1-2889-BFD6-F928-5C0F63A24E5E}"/>
-                </a:ext>
-              </a:extLst>
-            </p:cNvPr>
-            <p:cNvSpPr txBox="1"/>
-            <p:nvPr/>
-          </p:nvSpPr>
-          <p:spPr>
-            <a:xfrm>
-              <a:off x="-7260199" y="6388139"/>
-              <a:ext cx="397866" cy="646331"/>
-            </a:xfrm>
-            <a:prstGeom prst="rect">
-              <a:avLst/>
-            </a:prstGeom>
-            <a:noFill/>
-          </p:spPr>
-          <p:txBody>
-            <a:bodyPr wrap="none" rtlCol="0">
-              <a:spAutoFit/>
-            </a:bodyPr>
-            <a:lstStyle/>
-            <a:p>
-              <a:r>
-                <a:rPr lang="en-CA" sz="3600" dirty="0">
-                  <a:latin typeface="Roboto Condensed" pitchFamily="2" charset="0"/>
-                  <a:ea typeface="Roboto Condensed" pitchFamily="2" charset="0"/>
-                </a:rPr>
-                <a:t>c</a:t>
-              </a:r>
-            </a:p>
-          </p:txBody>
-        </p:sp>
-        <p:sp>
-          <p:nvSpPr>
-            <p:cNvPr id="33" name="TextBox 32">
-              <a:extLst>
-                <a:ext uri="{FF2B5EF4-FFF2-40B4-BE49-F238E27FC236}">
-                  <a16:creationId xmlns:a16="http://schemas.microsoft.com/office/drawing/2014/main" id="{FC1C339F-82BC-E577-9ABF-1B762C83BA5F}"/>
-                </a:ext>
-              </a:extLst>
-            </p:cNvPr>
-            <p:cNvSpPr txBox="1"/>
-            <p:nvPr/>
-          </p:nvSpPr>
-          <p:spPr>
-            <a:xfrm flipH="1">
-              <a:off x="-4211918" y="5534059"/>
-              <a:ext cx="4815230" cy="461665"/>
-            </a:xfrm>
-            <a:prstGeom prst="rect">
-              <a:avLst/>
-            </a:prstGeom>
-            <a:solidFill>
-              <a:schemeClr val="bg1"/>
-            </a:solidFill>
-          </p:spPr>
-          <p:txBody>
-            <a:bodyPr wrap="square" rtlCol="0">
-              <a:spAutoFit/>
-            </a:bodyPr>
-            <a:lstStyle/>
-            <a:p>
-              <a:pPr algn="r"/>
-              <a:r>
-                <a:rPr lang="en-CA" sz="2400" dirty="0">
-                  <a:latin typeface="Roboto Condensed" pitchFamily="2" charset="0"/>
-                  <a:ea typeface="Roboto Condensed" pitchFamily="2" charset="0"/>
-                </a:rPr>
-                <a:t>Annual mean temperature</a:t>
-              </a:r>
-            </a:p>
-          </p:txBody>
-        </p:sp>
-        <p:sp>
-          <p:nvSpPr>
-            <p:cNvPr id="34" name="TextBox 33">
-              <a:extLst>
-                <a:ext uri="{FF2B5EF4-FFF2-40B4-BE49-F238E27FC236}">
-                  <a16:creationId xmlns:a16="http://schemas.microsoft.com/office/drawing/2014/main" id="{7ADC66C3-5060-F73A-E19F-611A3DAD4BF5}"/>
-                </a:ext>
-              </a:extLst>
-            </p:cNvPr>
-            <p:cNvSpPr txBox="1"/>
-            <p:nvPr/>
-          </p:nvSpPr>
-          <p:spPr>
-            <a:xfrm rot="16200000" flipH="1">
-              <a:off x="-9403317" y="1486104"/>
-              <a:ext cx="4815230" cy="461665"/>
-            </a:xfrm>
-            <a:prstGeom prst="rect">
-              <a:avLst/>
-            </a:prstGeom>
-            <a:solidFill>
-              <a:schemeClr val="bg1"/>
-            </a:solidFill>
-          </p:spPr>
-          <p:txBody>
-            <a:bodyPr wrap="square" rtlCol="0">
-              <a:spAutoFit/>
-            </a:bodyPr>
-            <a:lstStyle/>
-            <a:p>
-              <a:pPr algn="r"/>
-              <a:r>
-                <a:rPr lang="en-CA" sz="2400" dirty="0">
-                  <a:latin typeface="Roboto Condensed" pitchFamily="2" charset="0"/>
-                  <a:ea typeface="Roboto Condensed" pitchFamily="2" charset="0"/>
-                </a:rPr>
-                <a:t>Annual precipitation</a:t>
-              </a:r>
-            </a:p>
-          </p:txBody>
-        </p:sp>
-        <p:sp>
-          <p:nvSpPr>
-            <p:cNvPr id="35" name="TextBox 34">
-              <a:extLst>
-                <a:ext uri="{FF2B5EF4-FFF2-40B4-BE49-F238E27FC236}">
-                  <a16:creationId xmlns:a16="http://schemas.microsoft.com/office/drawing/2014/main" id="{E2D2477F-F261-6845-2DA5-AEC65BC173BF}"/>
-                </a:ext>
-              </a:extLst>
-            </p:cNvPr>
-            <p:cNvSpPr txBox="1"/>
-            <p:nvPr/>
-          </p:nvSpPr>
-          <p:spPr>
-            <a:xfrm flipH="1">
-              <a:off x="4314461" y="5514479"/>
-              <a:ext cx="4815230" cy="461665"/>
-            </a:xfrm>
-            <a:prstGeom prst="rect">
-              <a:avLst/>
-            </a:prstGeom>
-            <a:solidFill>
-              <a:schemeClr val="bg1"/>
-            </a:solidFill>
-          </p:spPr>
-          <p:txBody>
-            <a:bodyPr wrap="square" rtlCol="0">
-              <a:spAutoFit/>
-            </a:bodyPr>
-            <a:lstStyle/>
-            <a:p>
-              <a:pPr algn="r"/>
-              <a:r>
-                <a:rPr lang="en-CA" sz="2400" dirty="0">
-                  <a:latin typeface="Roboto Condensed" pitchFamily="2" charset="0"/>
-                  <a:ea typeface="Roboto Condensed" pitchFamily="2" charset="0"/>
-                </a:rPr>
-                <a:t>Annual mean temperature</a:t>
-              </a:r>
-            </a:p>
-          </p:txBody>
-        </p:sp>
-        <p:sp>
-          <p:nvSpPr>
-            <p:cNvPr id="36" name="TextBox 35">
-              <a:extLst>
-                <a:ext uri="{FF2B5EF4-FFF2-40B4-BE49-F238E27FC236}">
-                  <a16:creationId xmlns:a16="http://schemas.microsoft.com/office/drawing/2014/main" id="{A2C825A7-3B1E-26D3-43BF-A7386DDF6229}"/>
-                </a:ext>
-              </a:extLst>
-            </p:cNvPr>
-            <p:cNvSpPr txBox="1"/>
-            <p:nvPr/>
-          </p:nvSpPr>
-          <p:spPr>
-            <a:xfrm rot="16200000" flipH="1">
-              <a:off x="-809909" y="1637003"/>
-              <a:ext cx="4815230" cy="461665"/>
-            </a:xfrm>
-            <a:prstGeom prst="rect">
-              <a:avLst/>
-            </a:prstGeom>
-            <a:solidFill>
-              <a:schemeClr val="bg1"/>
-            </a:solidFill>
-          </p:spPr>
-          <p:txBody>
-            <a:bodyPr wrap="square" rtlCol="0">
-              <a:spAutoFit/>
-            </a:bodyPr>
-            <a:lstStyle/>
-            <a:p>
-              <a:pPr algn="r"/>
-              <a:r>
-                <a:rPr lang="en-CA" sz="2400" dirty="0">
-                  <a:latin typeface="Roboto Condensed" pitchFamily="2" charset="0"/>
-                  <a:ea typeface="Roboto Condensed" pitchFamily="2" charset="0"/>
-                </a:rPr>
-                <a:t>Annual precipitation</a:t>
               </a:r>
             </a:p>
           </p:txBody>
